--- a/presentation/presentation.pptx
+++ b/presentation/presentation.pptx
@@ -16,6 +16,7 @@
     <p:sldId id="264" r:id="rId15"/>
     <p:sldId id="265" r:id="rId16"/>
     <p:sldId id="266" r:id="rId17"/>
+    <p:sldId id="267" r:id="rId18"/>
   </p:sldIdLst>
   <p:sldSz cx="12191695" cy="6858000" type="screen4x3"/>
   <p:notesSz cx="6858000" cy="9144000"/>
@@ -3491,7 +3492,7 @@
                 </a:solidFill>
                 <a:latin typeface="Cambria"/>
               </a:rPr>
-              <a:t>Summary</a:t>
+              <a:t>Analysis</a:t>
             </a:r>
           </a:p>
         </p:txBody>
@@ -3499,6 +3500,84 @@
       <p:sp>
         <p:nvSpPr>
           <p:cNvPr id="4" name="Rectangle 3"/>
+          <p:cNvSpPr/>
+          <p:nvPr/>
+        </p:nvSpPr>
+        <p:spPr>
+          <a:xfrm>
+            <a:off x="457200" y="777240"/>
+            <a:ext cx="54864" cy="320040"/>
+          </a:xfrm>
+          <a:prstGeom prst="rect">
+            <a:avLst/>
+          </a:prstGeom>
+          <a:solidFill>
+            <a:srgbClr val="E8A87C"/>
+          </a:solidFill>
+          <a:ln>
+            <a:noFill/>
+          </a:ln>
+        </p:spPr>
+        <p:style>
+          <a:lnRef idx="1">
+            <a:schemeClr val="accent1"/>
+          </a:lnRef>
+          <a:fillRef idx="3">
+            <a:schemeClr val="accent1"/>
+          </a:fillRef>
+          <a:effectRef idx="2">
+            <a:schemeClr val="accent1"/>
+          </a:effectRef>
+          <a:fontRef idx="minor">
+            <a:schemeClr val="lt1"/>
+          </a:fontRef>
+        </p:style>
+        <p:txBody>
+          <a:bodyPr rtlCol="0" anchor="ctr"/>
+          <a:lstStyle/>
+          <a:p>
+            <a:pPr algn="ctr"/>
+          </a:p>
+        </p:txBody>
+      </p:sp>
+      <p:sp>
+        <p:nvSpPr>
+          <p:cNvPr id="5" name="TextBox 4"/>
+          <p:cNvSpPr txBox="1"/>
+          <p:nvPr/>
+        </p:nvSpPr>
+        <p:spPr>
+          <a:xfrm>
+            <a:off x="594360" y="749808"/>
+            <a:ext cx="9144000" cy="365760"/>
+          </a:xfrm>
+          <a:prstGeom prst="rect">
+            <a:avLst/>
+          </a:prstGeom>
+          <a:noFill/>
+        </p:spPr>
+        <p:txBody>
+          <a:bodyPr wrap="square" lIns="0" rIns="0" tIns="0" bIns="0" anchor="t">
+            <a:spAutoFit/>
+          </a:bodyPr>
+          <a:lstStyle/>
+          <a:p>
+            <a:pPr algn="l"/>
+            <a:r>
+              <a:rPr sz="1600" b="1">
+                <a:solidFill>
+                  <a:srgbClr val="FFFFFF"/>
+                </a:solidFill>
+                <a:latin typeface="Cambria"/>
+              </a:rPr>
+              <a:t>Why Label Smoothing &gt; MaxEnt</a:t>
+            </a:r>
+          </a:p>
+        </p:txBody>
+      </p:sp>
+      <p:sp>
+        <p:nvSpPr>
+          <p:cNvPr id="6" name="Rectangle 5"/>
           <p:cNvSpPr/>
           <p:nvPr/>
         </p:nvSpPr>
@@ -3541,24 +3620,27 @@
       </p:sp>
       <p:sp>
         <p:nvSpPr>
-          <p:cNvPr id="5" name="Oval 4"/>
+          <p:cNvPr id="7" name="Rounded Rectangle 6"/>
           <p:cNvSpPr/>
           <p:nvPr/>
         </p:nvSpPr>
         <p:spPr>
           <a:xfrm>
-            <a:off x="640080" y="1645920"/>
-            <a:ext cx="731520" cy="731520"/>
-          </a:xfrm>
-          <a:prstGeom prst="ellipse">
-            <a:avLst/>
+            <a:off x="457200" y="1463040"/>
+            <a:ext cx="11247120" cy="1463040"/>
+          </a:xfrm>
+          <a:prstGeom prst="roundRect">
+            <a:avLst>
+              <a:gd name="adj" fmla="val 8000"/>
+            </a:avLst>
           </a:prstGeom>
           <a:solidFill>
-            <a:srgbClr val="5BB5BE"/>
+            <a:srgbClr val="555555"/>
           </a:solidFill>
           <a:ln>
             <a:noFill/>
           </a:ln>
+          <a:effectLst/>
         </p:spPr>
         <p:style>
           <a:lnRef idx="1">
@@ -3575,58 +3657,234 @@
           </a:fontRef>
         </p:style>
         <p:txBody>
-          <a:bodyPr rtlCol="0" anchor="ctr"/>
-          <a:lstStyle/>
-          <a:p>
-            <a:pPr algn="ctr"/>
-          </a:p>
-        </p:txBody>
-      </p:sp>
-      <p:sp>
-        <p:nvSpPr>
-          <p:cNvPr id="6" name="TextBox 5"/>
-          <p:cNvSpPr txBox="1"/>
-          <p:nvPr/>
-        </p:nvSpPr>
-        <p:spPr>
-          <a:xfrm>
-            <a:off x="640080" y="1709928"/>
-            <a:ext cx="731520" cy="594360"/>
-          </a:xfrm>
-          <a:prstGeom prst="rect">
-            <a:avLst/>
-          </a:prstGeom>
-          <a:noFill/>
-        </p:spPr>
-        <p:txBody>
-          <a:bodyPr wrap="square" lIns="0" rIns="0" tIns="0" bIns="0" anchor="t">
-            <a:spAutoFit/>
-          </a:bodyPr>
-          <a:lstStyle/>
-          <a:p>
-            <a:pPr algn="ctr"/>
-            <a:r>
-              <a:rPr sz="2200" b="1">
+          <a:bodyPr rtlCol="0" anchor="ctr" lIns="0" rIns="0" tIns="0" bIns="0"/>
+          <a:lstStyle/>
+          <a:p>
+            <a:pPr algn="ctr"/>
+          </a:p>
+        </p:txBody>
+      </p:sp>
+      <p:sp>
+        <p:nvSpPr>
+          <p:cNvPr id="8" name="TextBox 7"/>
+          <p:cNvSpPr txBox="1"/>
+          <p:nvPr/>
+        </p:nvSpPr>
+        <p:spPr>
+          <a:xfrm>
+            <a:off x="640080" y="1600200"/>
+            <a:ext cx="10972800" cy="365760"/>
+          </a:xfrm>
+          <a:prstGeom prst="rect">
+            <a:avLst/>
+          </a:prstGeom>
+          <a:noFill/>
+        </p:spPr>
+        <p:txBody>
+          <a:bodyPr wrap="square" lIns="0" rIns="0" tIns="0" bIns="0" anchor="t">
+            <a:spAutoFit/>
+          </a:bodyPr>
+          <a:lstStyle/>
+          <a:p>
+            <a:pPr algn="l"/>
+            <a:r>
+              <a:rPr sz="1600" b="1">
+                <a:solidFill>
+                  <a:srgbClr val="5BB5BE"/>
+                </a:solidFill>
+                <a:latin typeface="Cambria"/>
+              </a:rPr>
+              <a:t>Same family, different weighting:</a:t>
+            </a:r>
+          </a:p>
+        </p:txBody>
+      </p:sp>
+      <p:sp>
+        <p:nvSpPr>
+          <p:cNvPr id="9" name="TextBox 8"/>
+          <p:cNvSpPr txBox="1"/>
+          <p:nvPr/>
+        </p:nvSpPr>
+        <p:spPr>
+          <a:xfrm>
+            <a:off x="822960" y="2011680"/>
+            <a:ext cx="274320" cy="365760"/>
+          </a:xfrm>
+          <a:prstGeom prst="rect">
+            <a:avLst/>
+          </a:prstGeom>
+          <a:noFill/>
+        </p:spPr>
+        <p:txBody>
+          <a:bodyPr wrap="square" lIns="0" rIns="0" tIns="0" bIns="0" anchor="t">
+            <a:spAutoFit/>
+          </a:bodyPr>
+          <a:lstStyle/>
+          <a:p>
+            <a:pPr algn="l"/>
+            <a:r>
+              <a:rPr sz="1400" b="0">
+                <a:solidFill>
+                  <a:srgbClr val="E8A87C"/>
+                </a:solidFill>
+                <a:latin typeface="Calibri"/>
+              </a:rPr>
+              <a:t>●</a:t>
+            </a:r>
+          </a:p>
+        </p:txBody>
+      </p:sp>
+      <p:sp>
+        <p:nvSpPr>
+          <p:cNvPr id="10" name="TextBox 9"/>
+          <p:cNvSpPr txBox="1"/>
+          <p:nvPr/>
+        </p:nvSpPr>
+        <p:spPr>
+          <a:xfrm>
+            <a:off x="1051560" y="2011680"/>
+            <a:ext cx="10515600" cy="365760"/>
+          </a:xfrm>
+          <a:prstGeom prst="rect">
+            <a:avLst/>
+          </a:prstGeom>
+          <a:noFill/>
+        </p:spPr>
+        <p:txBody>
+          <a:bodyPr wrap="square" lIns="0" rIns="0" tIns="0" bIns="0" anchor="t">
+            <a:spAutoFit/>
+          </a:bodyPr>
+          <a:lstStyle/>
+          <a:p>
+            <a:pPr algn="l"/>
+            <a:r>
+              <a:rPr sz="1400" b="1" i="0">
+                <a:solidFill>
+                  <a:srgbClr val="E8A87C"/>
+                </a:solidFill>
+                <a:latin typeface="Calibri"/>
+              </a:rPr>
+              <a:t>MaxEnt: </a:t>
+            </a:r>
+            <a:r>
+              <a:rPr sz="1400" b="0" i="0">
                 <a:solidFill>
                   <a:srgbClr val="FFFFFF"/>
                 </a:solidFill>
-                <a:latin typeface="Cambria"/>
-              </a:rPr>
-              <a:t>01</a:t>
-            </a:r>
-          </a:p>
-        </p:txBody>
-      </p:sp>
-      <p:sp>
-        <p:nvSpPr>
-          <p:cNvPr id="7" name="Rounded Rectangle 6"/>
+                <a:latin typeface="Consolas"/>
+              </a:rPr>
+              <a:t>H(p) = −Σ pᵥ log pᵥ</a:t>
+            </a:r>
+            <a:r>
+              <a:rPr sz="1400" b="0" i="0">
+                <a:solidFill>
+                  <a:srgbClr val="FFFFFF"/>
+                </a:solidFill>
+                <a:latin typeface="Calibri"/>
+              </a:rPr>
+              <a:t>   →  weights by pᵥ — already-confident tokens get pushed first</a:t>
+            </a:r>
+          </a:p>
+        </p:txBody>
+      </p:sp>
+      <p:sp>
+        <p:nvSpPr>
+          <p:cNvPr id="11" name="TextBox 10"/>
+          <p:cNvSpPr txBox="1"/>
+          <p:nvPr/>
+        </p:nvSpPr>
+        <p:spPr>
+          <a:xfrm>
+            <a:off x="822960" y="2423160"/>
+            <a:ext cx="274320" cy="365760"/>
+          </a:xfrm>
+          <a:prstGeom prst="rect">
+            <a:avLst/>
+          </a:prstGeom>
+          <a:noFill/>
+        </p:spPr>
+        <p:txBody>
+          <a:bodyPr wrap="square" lIns="0" rIns="0" tIns="0" bIns="0" anchor="t">
+            <a:spAutoFit/>
+          </a:bodyPr>
+          <a:lstStyle/>
+          <a:p>
+            <a:pPr algn="l"/>
+            <a:r>
+              <a:rPr sz="1400" b="0">
+                <a:solidFill>
+                  <a:srgbClr val="E96379"/>
+                </a:solidFill>
+                <a:latin typeface="Calibri"/>
+              </a:rPr>
+              <a:t>●</a:t>
+            </a:r>
+          </a:p>
+        </p:txBody>
+      </p:sp>
+      <p:sp>
+        <p:nvSpPr>
+          <p:cNvPr id="12" name="TextBox 11"/>
+          <p:cNvSpPr txBox="1"/>
+          <p:nvPr/>
+        </p:nvSpPr>
+        <p:spPr>
+          <a:xfrm>
+            <a:off x="1051560" y="2423160"/>
+            <a:ext cx="10515600" cy="365760"/>
+          </a:xfrm>
+          <a:prstGeom prst="rect">
+            <a:avLst/>
+          </a:prstGeom>
+          <a:noFill/>
+        </p:spPr>
+        <p:txBody>
+          <a:bodyPr wrap="square" lIns="0" rIns="0" tIns="0" bIns="0" anchor="t">
+            <a:spAutoFit/>
+          </a:bodyPr>
+          <a:lstStyle/>
+          <a:p>
+            <a:pPr algn="l"/>
+            <a:r>
+              <a:rPr sz="1400" b="1" i="0">
+                <a:solidFill>
+                  <a:srgbClr val="E96379"/>
+                </a:solidFill>
+                <a:latin typeface="Calibri"/>
+              </a:rPr>
+              <a:t>LS:     </a:t>
+            </a:r>
+            <a:r>
+              <a:rPr sz="1400" b="0" i="0">
+                <a:solidFill>
+                  <a:srgbClr val="FFFFFF"/>
+                </a:solidFill>
+                <a:latin typeface="Consolas"/>
+              </a:rPr>
+              <a:t>LS(p) = −(1/V) Σ log pᵥ</a:t>
+            </a:r>
+            <a:r>
+              <a:rPr sz="1400" b="0" i="0">
+                <a:solidFill>
+                  <a:srgbClr val="FFFFFF"/>
+                </a:solidFill>
+                <a:latin typeface="Calibri"/>
+              </a:rPr>
+              <a:t>   →  uniform weight across vocab — all tokens regularized equally</a:t>
+            </a:r>
+          </a:p>
+        </p:txBody>
+      </p:sp>
+      <p:sp>
+        <p:nvSpPr>
+          <p:cNvPr id="13" name="Rounded Rectangle 12"/>
           <p:cNvSpPr/>
           <p:nvPr/>
         </p:nvSpPr>
         <p:spPr>
           <a:xfrm>
-            <a:off x="1645920" y="1463040"/>
-            <a:ext cx="10058400" cy="1188720"/>
+            <a:off x="457200" y="3108960"/>
+            <a:ext cx="11247120" cy="2743200"/>
           </a:xfrm>
           <a:prstGeom prst="roundRect">
             <a:avLst>
@@ -3665,14 +3923,14 @@
       </p:sp>
       <p:sp>
         <p:nvSpPr>
-          <p:cNvPr id="8" name="TextBox 7"/>
-          <p:cNvSpPr txBox="1"/>
-          <p:nvPr/>
-        </p:nvSpPr>
-        <p:spPr>
-          <a:xfrm>
-            <a:off x="1828800" y="1600200"/>
-            <a:ext cx="9601200" cy="457200"/>
+          <p:cNvPr id="14" name="TextBox 13"/>
+          <p:cNvSpPr txBox="1"/>
+          <p:nvPr/>
+        </p:nvSpPr>
+        <p:spPr>
+          <a:xfrm>
+            <a:off x="640080" y="3246120"/>
+            <a:ext cx="10972800" cy="365760"/>
           </a:xfrm>
           <a:prstGeom prst="rect">
             <a:avLst/>
@@ -3687,478 +3945,445 @@
           <a:p>
             <a:pPr algn="l"/>
             <a:r>
-              <a:rPr sz="1800" b="1">
+              <a:rPr sz="1600" b="1">
+                <a:solidFill>
+                  <a:srgbClr val="5BB5BE"/>
+                </a:solidFill>
+                <a:latin typeface="Cambria"/>
+              </a:rPr>
+              <a:t>Qualitative example (test-clean utterance 1)</a:t>
+            </a:r>
+          </a:p>
+        </p:txBody>
+      </p:sp>
+      <p:sp>
+        <p:nvSpPr>
+          <p:cNvPr id="15" name="TextBox 14"/>
+          <p:cNvSpPr txBox="1"/>
+          <p:nvPr/>
+        </p:nvSpPr>
+        <p:spPr>
+          <a:xfrm>
+            <a:off x="822960" y="3703320"/>
+            <a:ext cx="1371600" cy="365760"/>
+          </a:xfrm>
+          <a:prstGeom prst="rect">
+            <a:avLst/>
+          </a:prstGeom>
+          <a:noFill/>
+        </p:spPr>
+        <p:txBody>
+          <a:bodyPr wrap="square" lIns="0" rIns="0" tIns="0" bIns="0" anchor="t">
+            <a:spAutoFit/>
+          </a:bodyPr>
+          <a:lstStyle/>
+          <a:p>
+            <a:pPr algn="l"/>
+            <a:r>
+              <a:rPr sz="1300" b="1">
+                <a:solidFill>
+                  <a:srgbClr val="F5C86E"/>
+                </a:solidFill>
+                <a:latin typeface="Consolas"/>
+              </a:rPr>
+              <a:t>REF:</a:t>
+            </a:r>
+          </a:p>
+        </p:txBody>
+      </p:sp>
+      <p:sp>
+        <p:nvSpPr>
+          <p:cNvPr id="16" name="TextBox 15"/>
+          <p:cNvSpPr txBox="1"/>
+          <p:nvPr/>
+        </p:nvSpPr>
+        <p:spPr>
+          <a:xfrm>
+            <a:off x="1828800" y="3703320"/>
+            <a:ext cx="9601200" cy="365760"/>
+          </a:xfrm>
+          <a:prstGeom prst="rect">
+            <a:avLst/>
+          </a:prstGeom>
+          <a:noFill/>
+        </p:spPr>
+        <p:txBody>
+          <a:bodyPr wrap="square" lIns="0" rIns="0" tIns="0" bIns="0" anchor="t">
+            <a:spAutoFit/>
+          </a:bodyPr>
+          <a:lstStyle/>
+          <a:p>
+            <a:pPr algn="l"/>
+            <a:r>
+              <a:rPr sz="1200" b="0" i="0">
+                <a:solidFill>
+                  <a:srgbClr val="FFFFFF"/>
+                </a:solidFill>
+                <a:latin typeface="Consolas"/>
+              </a:rPr>
+              <a:t>... THEORY OF </a:t>
+            </a:r>
+            <a:r>
+              <a:rPr sz="1200" b="1" i="0">
                 <a:solidFill>
                   <a:srgbClr val="E8A87C"/>
                 </a:solidFill>
+                <a:latin typeface="Consolas"/>
+              </a:rPr>
+              <a:t>MEMORY</a:t>
+            </a:r>
+            <a:r>
+              <a:rPr sz="1200" b="0" i="0">
+                <a:solidFill>
+                  <a:srgbClr val="FFFFFF"/>
+                </a:solidFill>
+                <a:latin typeface="Consolas"/>
+              </a:rPr>
+              <a:t> MUST </a:t>
+            </a:r>
+            <a:r>
+              <a:rPr sz="1200" b="1" i="0">
+                <a:solidFill>
+                  <a:srgbClr val="E8A87C"/>
+                </a:solidFill>
+                <a:latin typeface="Consolas"/>
+              </a:rPr>
+              <a:t>ARRIVE</a:t>
+            </a:r>
+            <a:r>
+              <a:rPr sz="1200" b="0" i="0">
+                <a:solidFill>
+                  <a:srgbClr val="FFFFFF"/>
+                </a:solidFill>
+                <a:latin typeface="Consolas"/>
+              </a:rPr>
+              <a:t> AT ... </a:t>
+            </a:r>
+            <a:r>
+              <a:rPr sz="1200" b="1" i="0">
+                <a:solidFill>
+                  <a:srgbClr val="E8A87C"/>
+                </a:solidFill>
+                <a:latin typeface="Consolas"/>
+              </a:rPr>
+              <a:t>VIRTUE</a:t>
+            </a:r>
+            <a:r>
+              <a:rPr sz="1200" b="0" i="0">
+                <a:solidFill>
+                  <a:srgbClr val="FFFFFF"/>
+                </a:solidFill>
+                <a:latin typeface="Consolas"/>
+              </a:rPr>
+              <a:t> ... </a:t>
+            </a:r>
+            <a:r>
+              <a:rPr sz="1200" b="1" i="0">
+                <a:solidFill>
+                  <a:srgbClr val="E8A87C"/>
+                </a:solidFill>
+                <a:latin typeface="Consolas"/>
+              </a:rPr>
+              <a:t>SINGLED OUT</a:t>
+            </a:r>
+            <a:r>
+              <a:rPr sz="1200" b="0" i="0">
+                <a:solidFill>
+                  <a:srgbClr val="FFFFFF"/>
+                </a:solidFill>
+                <a:latin typeface="Consolas"/>
+              </a:rPr>
+              <a:t> ...</a:t>
+            </a:r>
+          </a:p>
+        </p:txBody>
+      </p:sp>
+      <p:sp>
+        <p:nvSpPr>
+          <p:cNvPr id="17" name="TextBox 16"/>
+          <p:cNvSpPr txBox="1"/>
+          <p:nvPr/>
+        </p:nvSpPr>
+        <p:spPr>
+          <a:xfrm>
+            <a:off x="822960" y="4206240"/>
+            <a:ext cx="1371600" cy="365760"/>
+          </a:xfrm>
+          <a:prstGeom prst="rect">
+            <a:avLst/>
+          </a:prstGeom>
+          <a:noFill/>
+        </p:spPr>
+        <p:txBody>
+          <a:bodyPr wrap="square" lIns="0" rIns="0" tIns="0" bIns="0" anchor="t">
+            <a:spAutoFit/>
+          </a:bodyPr>
+          <a:lstStyle/>
+          <a:p>
+            <a:pPr algn="l"/>
+            <a:r>
+              <a:rPr sz="1300" b="1">
+                <a:solidFill>
+                  <a:srgbClr val="E96379"/>
+                </a:solidFill>
+                <a:latin typeface="Consolas"/>
+              </a:rPr>
+              <a:t>Baseline:</a:t>
+            </a:r>
+          </a:p>
+        </p:txBody>
+      </p:sp>
+      <p:sp>
+        <p:nvSpPr>
+          <p:cNvPr id="18" name="TextBox 17"/>
+          <p:cNvSpPr txBox="1"/>
+          <p:nvPr/>
+        </p:nvSpPr>
+        <p:spPr>
+          <a:xfrm>
+            <a:off x="1828800" y="4206240"/>
+            <a:ext cx="9601200" cy="365760"/>
+          </a:xfrm>
+          <a:prstGeom prst="rect">
+            <a:avLst/>
+          </a:prstGeom>
+          <a:noFill/>
+        </p:spPr>
+        <p:txBody>
+          <a:bodyPr wrap="square" lIns="0" rIns="0" tIns="0" bIns="0" anchor="t">
+            <a:spAutoFit/>
+          </a:bodyPr>
+          <a:lstStyle/>
+          <a:p>
+            <a:pPr algn="l"/>
+            <a:r>
+              <a:rPr sz="1200" b="0" i="0">
+                <a:solidFill>
+                  <a:srgbClr val="FFFFFF"/>
+                </a:solidFill>
+                <a:latin typeface="Consolas"/>
+              </a:rPr>
+              <a:t>... THEORY OF MEMERY MUST </a:t>
+            </a:r>
+            <a:r>
+              <a:rPr sz="1200" b="1" i="0">
+                <a:solidFill>
+                  <a:srgbClr val="E96379"/>
+                </a:solidFill>
+                <a:latin typeface="Consolas"/>
+              </a:rPr>
+              <a:t>ARIVE</a:t>
+            </a:r>
+            <a:r>
+              <a:rPr sz="1200" b="0" i="0">
+                <a:solidFill>
+                  <a:srgbClr val="FFFFFF"/>
+                </a:solidFill>
+                <a:latin typeface="Consolas"/>
+              </a:rPr>
+              <a:t> AT ... </a:t>
+            </a:r>
+            <a:r>
+              <a:rPr sz="1200" b="1" i="0">
+                <a:solidFill>
+                  <a:srgbClr val="E96379"/>
+                </a:solidFill>
+                <a:latin typeface="Consolas"/>
+              </a:rPr>
+              <a:t>VERTUE</a:t>
+            </a:r>
+            <a:r>
+              <a:rPr sz="1200" b="0" i="0">
+                <a:solidFill>
+                  <a:srgbClr val="FFFFFF"/>
+                </a:solidFill>
+                <a:latin typeface="Consolas"/>
+              </a:rPr>
+              <a:t> ... </a:t>
+            </a:r>
+            <a:r>
+              <a:rPr sz="1200" b="1" i="0">
+                <a:solidFill>
+                  <a:srgbClr val="E96379"/>
+                </a:solidFill>
+                <a:latin typeface="Consolas"/>
+              </a:rPr>
+              <a:t>SINGLEDOUT</a:t>
+            </a:r>
+            <a:r>
+              <a:rPr sz="1200" b="0" i="0">
+                <a:solidFill>
+                  <a:srgbClr val="FFFFFF"/>
+                </a:solidFill>
+                <a:latin typeface="Consolas"/>
+              </a:rPr>
+              <a:t> ...</a:t>
+            </a:r>
+          </a:p>
+        </p:txBody>
+      </p:sp>
+      <p:sp>
+        <p:nvSpPr>
+          <p:cNvPr id="19" name="TextBox 18"/>
+          <p:cNvSpPr txBox="1"/>
+          <p:nvPr/>
+        </p:nvSpPr>
+        <p:spPr>
+          <a:xfrm>
+            <a:off x="822960" y="4709160"/>
+            <a:ext cx="1371600" cy="365760"/>
+          </a:xfrm>
+          <a:prstGeom prst="rect">
+            <a:avLst/>
+          </a:prstGeom>
+          <a:noFill/>
+        </p:spPr>
+        <p:txBody>
+          <a:bodyPr wrap="square" lIns="0" rIns="0" tIns="0" bIns="0" anchor="t">
+            <a:spAutoFit/>
+          </a:bodyPr>
+          <a:lstStyle/>
+          <a:p>
+            <a:pPr algn="l"/>
+            <a:r>
+              <a:rPr sz="1300" b="1">
+                <a:solidFill>
+                  <a:srgbClr val="5BB5BE"/>
+                </a:solidFill>
+                <a:latin typeface="Consolas"/>
+              </a:rPr>
+              <a:t>LS α=0.10:</a:t>
+            </a:r>
+          </a:p>
+        </p:txBody>
+      </p:sp>
+      <p:sp>
+        <p:nvSpPr>
+          <p:cNvPr id="20" name="TextBox 19"/>
+          <p:cNvSpPr txBox="1"/>
+          <p:nvPr/>
+        </p:nvSpPr>
+        <p:spPr>
+          <a:xfrm>
+            <a:off x="1828800" y="4709160"/>
+            <a:ext cx="9601200" cy="365760"/>
+          </a:xfrm>
+          <a:prstGeom prst="rect">
+            <a:avLst/>
+          </a:prstGeom>
+          <a:noFill/>
+        </p:spPr>
+        <p:txBody>
+          <a:bodyPr wrap="square" lIns="0" rIns="0" tIns="0" bIns="0" anchor="t">
+            <a:spAutoFit/>
+          </a:bodyPr>
+          <a:lstStyle/>
+          <a:p>
+            <a:pPr algn="l"/>
+            <a:r>
+              <a:rPr sz="1200" b="0" i="0">
+                <a:solidFill>
+                  <a:srgbClr val="FFFFFF"/>
+                </a:solidFill>
+                <a:latin typeface="Consolas"/>
+              </a:rPr>
+              <a:t>... THEORY OF MEMERY MUST </a:t>
+            </a:r>
+            <a:r>
+              <a:rPr sz="1200" b="1" i="0">
+                <a:solidFill>
+                  <a:srgbClr val="5BB5BE"/>
+                </a:solidFill>
+                <a:latin typeface="Consolas"/>
+              </a:rPr>
+              <a:t>ARRIVE</a:t>
+            </a:r>
+            <a:r>
+              <a:rPr sz="1200" b="0" i="0">
+                <a:solidFill>
+                  <a:srgbClr val="FFFFFF"/>
+                </a:solidFill>
+                <a:latin typeface="Consolas"/>
+              </a:rPr>
+              <a:t> AT ... </a:t>
+            </a:r>
+            <a:r>
+              <a:rPr sz="1200" b="1" i="0">
+                <a:solidFill>
+                  <a:srgbClr val="5BB5BE"/>
+                </a:solidFill>
+                <a:latin typeface="Consolas"/>
+              </a:rPr>
+              <a:t>VIRTUE</a:t>
+            </a:r>
+            <a:r>
+              <a:rPr sz="1200" b="0" i="0">
+                <a:solidFill>
+                  <a:srgbClr val="FFFFFF"/>
+                </a:solidFill>
+                <a:latin typeface="Consolas"/>
+              </a:rPr>
+              <a:t> ... </a:t>
+            </a:r>
+            <a:r>
+              <a:rPr sz="1200" b="1" i="0">
+                <a:solidFill>
+                  <a:srgbClr val="5BB5BE"/>
+                </a:solidFill>
+                <a:latin typeface="Consolas"/>
+              </a:rPr>
+              <a:t>SINGLED OUT</a:t>
+            </a:r>
+            <a:r>
+              <a:rPr sz="1200" b="0" i="0">
+                <a:solidFill>
+                  <a:srgbClr val="FFFFFF"/>
+                </a:solidFill>
+                <a:latin typeface="Consolas"/>
+              </a:rPr>
+              <a:t> ...</a:t>
+            </a:r>
+          </a:p>
+        </p:txBody>
+      </p:sp>
+      <p:sp>
+        <p:nvSpPr>
+          <p:cNvPr id="21" name="TextBox 20"/>
+          <p:cNvSpPr txBox="1"/>
+          <p:nvPr/>
+        </p:nvSpPr>
+        <p:spPr>
+          <a:xfrm>
+            <a:off x="640080" y="5349240"/>
+            <a:ext cx="10972800" cy="365760"/>
+          </a:xfrm>
+          <a:prstGeom prst="rect">
+            <a:avLst/>
+          </a:prstGeom>
+          <a:noFill/>
+        </p:spPr>
+        <p:txBody>
+          <a:bodyPr wrap="square" lIns="0" rIns="0" tIns="0" bIns="0" anchor="t">
+            <a:spAutoFit/>
+          </a:bodyPr>
+          <a:lstStyle/>
+          <a:p>
+            <a:pPr algn="l"/>
+            <a:r>
+              <a:rPr sz="1300" b="0">
+                <a:solidFill>
+                  <a:srgbClr val="F5C86E"/>
+                </a:solidFill>
                 <a:latin typeface="Cambria"/>
               </a:rPr>
-              <a:t>Two regularizers compared</a:t>
-            </a:r>
-          </a:p>
-        </p:txBody>
-      </p:sp>
-      <p:sp>
-        <p:nvSpPr>
-          <p:cNvPr id="9" name="TextBox 8"/>
-          <p:cNvSpPr txBox="1"/>
-          <p:nvPr/>
-        </p:nvSpPr>
-        <p:spPr>
-          <a:xfrm>
-            <a:off x="1828800" y="2057400"/>
-            <a:ext cx="9784080" cy="640080"/>
-          </a:xfrm>
-          <a:prstGeom prst="rect">
-            <a:avLst/>
-          </a:prstGeom>
-          <a:noFill/>
-        </p:spPr>
-        <p:txBody>
-          <a:bodyPr wrap="square" lIns="0" rIns="0" tIns="0" bIns="0" anchor="t">
-            <a:spAutoFit/>
-          </a:bodyPr>
-          <a:lstStyle/>
-          <a:p>
-            <a:pPr algn="l"/>
-            <a:r>
-              <a:rPr sz="1400" b="0">
-                <a:solidFill>
-                  <a:srgbClr val="FFFFFF"/>
-                </a:solidFill>
-                <a:latin typeface="Calibri"/>
-              </a:rPr>
-              <a:t>Maximum Entropy (H(p)) and Label Smoothing (uniform target). Both target the over-confidence problem on small fine-tune sets.</a:t>
-            </a:r>
-          </a:p>
-        </p:txBody>
-      </p:sp>
-      <p:sp>
-        <p:nvSpPr>
-          <p:cNvPr id="10" name="Oval 9"/>
-          <p:cNvSpPr/>
-          <p:nvPr/>
-        </p:nvSpPr>
-        <p:spPr>
-          <a:xfrm>
-            <a:off x="640080" y="3063240"/>
-            <a:ext cx="731520" cy="731520"/>
-          </a:xfrm>
-          <a:prstGeom prst="ellipse">
-            <a:avLst/>
-          </a:prstGeom>
-          <a:solidFill>
-            <a:srgbClr val="5BB5BE"/>
-          </a:solidFill>
-          <a:ln>
-            <a:noFill/>
-          </a:ln>
-        </p:spPr>
-        <p:style>
-          <a:lnRef idx="1">
-            <a:schemeClr val="accent1"/>
-          </a:lnRef>
-          <a:fillRef idx="3">
-            <a:schemeClr val="accent1"/>
-          </a:fillRef>
-          <a:effectRef idx="2">
-            <a:schemeClr val="accent1"/>
-          </a:effectRef>
-          <a:fontRef idx="minor">
-            <a:schemeClr val="lt1"/>
-          </a:fontRef>
-        </p:style>
-        <p:txBody>
-          <a:bodyPr rtlCol="0" anchor="ctr"/>
-          <a:lstStyle/>
-          <a:p>
-            <a:pPr algn="ctr"/>
-          </a:p>
-        </p:txBody>
-      </p:sp>
-      <p:sp>
-        <p:nvSpPr>
-          <p:cNvPr id="11" name="TextBox 10"/>
-          <p:cNvSpPr txBox="1"/>
-          <p:nvPr/>
-        </p:nvSpPr>
-        <p:spPr>
-          <a:xfrm>
-            <a:off x="640080" y="3127248"/>
-            <a:ext cx="731520" cy="594360"/>
-          </a:xfrm>
-          <a:prstGeom prst="rect">
-            <a:avLst/>
-          </a:prstGeom>
-          <a:noFill/>
-        </p:spPr>
-        <p:txBody>
-          <a:bodyPr wrap="square" lIns="0" rIns="0" tIns="0" bIns="0" anchor="t">
-            <a:spAutoFit/>
-          </a:bodyPr>
-          <a:lstStyle/>
-          <a:p>
-            <a:pPr algn="ctr"/>
-            <a:r>
-              <a:rPr sz="2200" b="1">
-                <a:solidFill>
-                  <a:srgbClr val="FFFFFF"/>
-                </a:solidFill>
-                <a:latin typeface="Cambria"/>
-              </a:rPr>
-              <a:t>02</a:t>
-            </a:r>
-          </a:p>
-        </p:txBody>
-      </p:sp>
-      <p:sp>
-        <p:nvSpPr>
-          <p:cNvPr id="12" name="Rounded Rectangle 11"/>
-          <p:cNvSpPr/>
-          <p:nvPr/>
-        </p:nvSpPr>
-        <p:spPr>
-          <a:xfrm>
-            <a:off x="1645920" y="2880360"/>
-            <a:ext cx="10058400" cy="1188720"/>
-          </a:xfrm>
-          <a:prstGeom prst="roundRect">
-            <a:avLst>
-              <a:gd name="adj" fmla="val 8000"/>
-            </a:avLst>
-          </a:prstGeom>
-          <a:solidFill>
-            <a:srgbClr val="4E4E4E"/>
-          </a:solidFill>
-          <a:ln>
-            <a:noFill/>
-          </a:ln>
-          <a:effectLst/>
-        </p:spPr>
-        <p:style>
-          <a:lnRef idx="1">
-            <a:schemeClr val="accent1"/>
-          </a:lnRef>
-          <a:fillRef idx="3">
-            <a:schemeClr val="accent1"/>
-          </a:fillRef>
-          <a:effectRef idx="2">
-            <a:schemeClr val="accent1"/>
-          </a:effectRef>
-          <a:fontRef idx="minor">
-            <a:schemeClr val="lt1"/>
-          </a:fontRef>
-        </p:style>
-        <p:txBody>
-          <a:bodyPr rtlCol="0" anchor="ctr" lIns="0" rIns="0" tIns="0" bIns="0"/>
-          <a:lstStyle/>
-          <a:p>
-            <a:pPr algn="ctr"/>
-          </a:p>
-        </p:txBody>
-      </p:sp>
-      <p:sp>
-        <p:nvSpPr>
-          <p:cNvPr id="13" name="TextBox 12"/>
-          <p:cNvSpPr txBox="1"/>
-          <p:nvPr/>
-        </p:nvSpPr>
-        <p:spPr>
-          <a:xfrm>
-            <a:off x="1828800" y="3017520"/>
-            <a:ext cx="9601200" cy="457200"/>
-          </a:xfrm>
-          <a:prstGeom prst="rect">
-            <a:avLst/>
-          </a:prstGeom>
-          <a:noFill/>
-        </p:spPr>
-        <p:txBody>
-          <a:bodyPr wrap="square" lIns="0" rIns="0" tIns="0" bIns="0" anchor="t">
-            <a:spAutoFit/>
-          </a:bodyPr>
-          <a:lstStyle/>
-          <a:p>
-            <a:pPr algn="l"/>
-            <a:r>
-              <a:rPr sz="1800" b="1">
-                <a:solidFill>
-                  <a:srgbClr val="E8A87C"/>
-                </a:solidFill>
-                <a:latin typeface="Cambria"/>
-              </a:rPr>
-              <a:t>Label Smoothing wins</a:t>
-            </a:r>
-          </a:p>
-        </p:txBody>
-      </p:sp>
-      <p:sp>
-        <p:nvSpPr>
-          <p:cNvPr id="14" name="TextBox 13"/>
-          <p:cNvSpPr txBox="1"/>
-          <p:nvPr/>
-        </p:nvSpPr>
-        <p:spPr>
-          <a:xfrm>
-            <a:off x="1828800" y="3474720"/>
-            <a:ext cx="9784080" cy="640080"/>
-          </a:xfrm>
-          <a:prstGeom prst="rect">
-            <a:avLst/>
-          </a:prstGeom>
-          <a:noFill/>
-        </p:spPr>
-        <p:txBody>
-          <a:bodyPr wrap="square" lIns="0" rIns="0" tIns="0" bIns="0" anchor="t">
-            <a:spAutoFit/>
-          </a:bodyPr>
-          <a:lstStyle/>
-          <a:p>
-            <a:pPr algn="l"/>
-            <a:r>
-              <a:rPr sz="1400" b="0">
-                <a:solidFill>
-                  <a:srgbClr val="FFFFFF"/>
-                </a:solidFill>
-                <a:latin typeface="Calibri"/>
-              </a:rPr>
-              <a:t>Test-clean 19.51 % / test-other 28.30 %. Outperforms baseline by −1.65 / −1.87 pp and MaxEnt by −0.42 / −0.50 pp.</a:t>
-            </a:r>
-          </a:p>
-        </p:txBody>
-      </p:sp>
-      <p:sp>
-        <p:nvSpPr>
-          <p:cNvPr id="15" name="Oval 14"/>
-          <p:cNvSpPr/>
-          <p:nvPr/>
-        </p:nvSpPr>
-        <p:spPr>
-          <a:xfrm>
-            <a:off x="640080" y="4480560"/>
-            <a:ext cx="731520" cy="731520"/>
-          </a:xfrm>
-          <a:prstGeom prst="ellipse">
-            <a:avLst/>
-          </a:prstGeom>
-          <a:solidFill>
-            <a:srgbClr val="5BB5BE"/>
-          </a:solidFill>
-          <a:ln>
-            <a:noFill/>
-          </a:ln>
-        </p:spPr>
-        <p:style>
-          <a:lnRef idx="1">
-            <a:schemeClr val="accent1"/>
-          </a:lnRef>
-          <a:fillRef idx="3">
-            <a:schemeClr val="accent1"/>
-          </a:fillRef>
-          <a:effectRef idx="2">
-            <a:schemeClr val="accent1"/>
-          </a:effectRef>
-          <a:fontRef idx="minor">
-            <a:schemeClr val="lt1"/>
-          </a:fontRef>
-        </p:style>
-        <p:txBody>
-          <a:bodyPr rtlCol="0" anchor="ctr"/>
-          <a:lstStyle/>
-          <a:p>
-            <a:pPr algn="ctr"/>
-          </a:p>
-        </p:txBody>
-      </p:sp>
-      <p:sp>
-        <p:nvSpPr>
-          <p:cNvPr id="16" name="TextBox 15"/>
-          <p:cNvSpPr txBox="1"/>
-          <p:nvPr/>
-        </p:nvSpPr>
-        <p:spPr>
-          <a:xfrm>
-            <a:off x="640080" y="4544568"/>
-            <a:ext cx="731520" cy="594360"/>
-          </a:xfrm>
-          <a:prstGeom prst="rect">
-            <a:avLst/>
-          </a:prstGeom>
-          <a:noFill/>
-        </p:spPr>
-        <p:txBody>
-          <a:bodyPr wrap="square" lIns="0" rIns="0" tIns="0" bIns="0" anchor="t">
-            <a:spAutoFit/>
-          </a:bodyPr>
-          <a:lstStyle/>
-          <a:p>
-            <a:pPr algn="ctr"/>
-            <a:r>
-              <a:rPr sz="2200" b="1">
-                <a:solidFill>
-                  <a:srgbClr val="FFFFFF"/>
-                </a:solidFill>
-                <a:latin typeface="Cambria"/>
-              </a:rPr>
-              <a:t>03</a:t>
-            </a:r>
-          </a:p>
-        </p:txBody>
-      </p:sp>
-      <p:sp>
-        <p:nvSpPr>
-          <p:cNvPr id="17" name="Rounded Rectangle 16"/>
-          <p:cNvSpPr/>
-          <p:nvPr/>
-        </p:nvSpPr>
-        <p:spPr>
-          <a:xfrm>
-            <a:off x="1645920" y="4297680"/>
-            <a:ext cx="10058400" cy="1188720"/>
-          </a:xfrm>
-          <a:prstGeom prst="roundRect">
-            <a:avLst>
-              <a:gd name="adj" fmla="val 8000"/>
-            </a:avLst>
-          </a:prstGeom>
-          <a:solidFill>
-            <a:srgbClr val="4E4E4E"/>
-          </a:solidFill>
-          <a:ln>
-            <a:noFill/>
-          </a:ln>
-          <a:effectLst/>
-        </p:spPr>
-        <p:style>
-          <a:lnRef idx="1">
-            <a:schemeClr val="accent1"/>
-          </a:lnRef>
-          <a:fillRef idx="3">
-            <a:schemeClr val="accent1"/>
-          </a:fillRef>
-          <a:effectRef idx="2">
-            <a:schemeClr val="accent1"/>
-          </a:effectRef>
-          <a:fontRef idx="minor">
-            <a:schemeClr val="lt1"/>
-          </a:fontRef>
-        </p:style>
-        <p:txBody>
-          <a:bodyPr rtlCol="0" anchor="ctr" lIns="0" rIns="0" tIns="0" bIns="0"/>
-          <a:lstStyle/>
-          <a:p>
-            <a:pPr algn="ctr"/>
-          </a:p>
-        </p:txBody>
-      </p:sp>
-      <p:sp>
-        <p:nvSpPr>
-          <p:cNvPr id="18" name="TextBox 17"/>
-          <p:cNvSpPr txBox="1"/>
-          <p:nvPr/>
-        </p:nvSpPr>
-        <p:spPr>
-          <a:xfrm>
-            <a:off x="1828800" y="4434840"/>
-            <a:ext cx="9601200" cy="457200"/>
-          </a:xfrm>
-          <a:prstGeom prst="rect">
-            <a:avLst/>
-          </a:prstGeom>
-          <a:noFill/>
-        </p:spPr>
-        <p:txBody>
-          <a:bodyPr wrap="square" lIns="0" rIns="0" tIns="0" bIns="0" anchor="t">
-            <a:spAutoFit/>
-          </a:bodyPr>
-          <a:lstStyle/>
-          <a:p>
-            <a:pPr algn="l"/>
-            <a:r>
-              <a:rPr sz="1800" b="1">
-                <a:solidFill>
-                  <a:srgbClr val="E8A87C"/>
-                </a:solidFill>
-                <a:latin typeface="Cambria"/>
-              </a:rPr>
-              <a:t>Bigger gains where it hurts</a:t>
-            </a:r>
-          </a:p>
-        </p:txBody>
-      </p:sp>
-      <p:sp>
-        <p:nvSpPr>
-          <p:cNvPr id="19" name="TextBox 18"/>
-          <p:cNvSpPr txBox="1"/>
-          <p:nvPr/>
-        </p:nvSpPr>
-        <p:spPr>
-          <a:xfrm>
-            <a:off x="1828800" y="4892040"/>
-            <a:ext cx="9784080" cy="640080"/>
-          </a:xfrm>
-          <a:prstGeom prst="rect">
-            <a:avLst/>
-          </a:prstGeom>
-          <a:noFill/>
-        </p:spPr>
-        <p:txBody>
-          <a:bodyPr wrap="square" lIns="0" rIns="0" tIns="0" bIns="0" anchor="t">
-            <a:spAutoFit/>
-          </a:bodyPr>
-          <a:lstStyle/>
-          <a:p>
-            <a:pPr algn="l"/>
-            <a:r>
-              <a:rPr sz="1400" b="0">
-                <a:solidFill>
-                  <a:srgbClr val="FFFFFF"/>
-                </a:solidFill>
-                <a:latin typeface="Calibri"/>
-              </a:rPr>
-              <a:t>Improvement is larger on the harder test-other split — regularization helps generalization most under acoustic mismatch.</a:t>
-            </a:r>
-          </a:p>
-        </p:txBody>
-      </p:sp>
-      <p:sp>
-        <p:nvSpPr>
-          <p:cNvPr id="20" name="TextBox 19"/>
-          <p:cNvSpPr txBox="1"/>
-          <p:nvPr/>
-        </p:nvSpPr>
-        <p:spPr>
-          <a:xfrm>
-            <a:off x="457200" y="5943600"/>
-            <a:ext cx="11247120" cy="365760"/>
-          </a:xfrm>
-          <a:prstGeom prst="rect">
-            <a:avLst/>
-          </a:prstGeom>
-          <a:noFill/>
-        </p:spPr>
-        <p:txBody>
-          <a:bodyPr wrap="square" lIns="0" rIns="0" tIns="0" bIns="0" anchor="t">
-            <a:spAutoFit/>
-          </a:bodyPr>
-          <a:lstStyle/>
-          <a:p>
-            <a:pPr algn="ctr"/>
-            <a:r>
-              <a:rPr sz="1300" b="0">
-                <a:solidFill>
-                  <a:srgbClr val="F5C86E"/>
-                </a:solidFill>
-                <a:latin typeface="Cambria"/>
-              </a:rPr>
-              <a:t>Future: α sweep for Label Smoothing, SpecAugment data augmentation, LM shallow fusion.</a:t>
-            </a:r>
-          </a:p>
-        </p:txBody>
-      </p:sp>
-      <p:sp>
-        <p:nvSpPr>
-          <p:cNvPr id="21" name="TextBox 20"/>
+              <a:t>→ Spelling errors (ARIVE, VERTUE) and spacing (SINGLEDOUT) corrected by Label Smoothing.</a:t>
+            </a:r>
+          </a:p>
+        </p:txBody>
+      </p:sp>
+      <p:sp>
+        <p:nvSpPr>
+          <p:cNvPr id="22" name="TextBox 21"/>
           <p:cNvSpPr txBox="1"/>
           <p:nvPr/>
         </p:nvSpPr>
@@ -4193,7 +4418,7 @@
       </p:sp>
       <p:sp>
         <p:nvSpPr>
-          <p:cNvPr id="22" name="TextBox 21"/>
+          <p:cNvPr id="23" name="TextBox 22"/>
           <p:cNvSpPr txBox="1"/>
           <p:nvPr/>
         </p:nvSpPr>
@@ -4259,6 +4484,833 @@
             <a:avLst/>
           </a:prstGeom>
           <a:solidFill>
+            <a:srgbClr val="3A3A3A"/>
+          </a:solidFill>
+          <a:ln>
+            <a:noFill/>
+          </a:ln>
+          <a:effectLst/>
+        </p:spPr>
+        <p:style>
+          <a:lnRef idx="1">
+            <a:schemeClr val="accent1"/>
+          </a:lnRef>
+          <a:fillRef idx="3">
+            <a:schemeClr val="accent1"/>
+          </a:fillRef>
+          <a:effectRef idx="2">
+            <a:schemeClr val="accent1"/>
+          </a:effectRef>
+          <a:fontRef idx="minor">
+            <a:schemeClr val="lt1"/>
+          </a:fontRef>
+        </p:style>
+        <p:txBody>
+          <a:bodyPr rtlCol="0" anchor="ctr"/>
+          <a:lstStyle/>
+          <a:p>
+            <a:pPr algn="ctr"/>
+          </a:p>
+        </p:txBody>
+      </p:sp>
+      <p:sp>
+        <p:nvSpPr>
+          <p:cNvPr id="3" name="TextBox 2"/>
+          <p:cNvSpPr txBox="1"/>
+          <p:nvPr/>
+        </p:nvSpPr>
+        <p:spPr>
+          <a:xfrm>
+            <a:off x="457200" y="228600"/>
+            <a:ext cx="7315200" cy="548640"/>
+          </a:xfrm>
+          <a:prstGeom prst="rect">
+            <a:avLst/>
+          </a:prstGeom>
+          <a:noFill/>
+        </p:spPr>
+        <p:txBody>
+          <a:bodyPr wrap="square" lIns="0" rIns="0" tIns="0" bIns="0" anchor="t">
+            <a:spAutoFit/>
+          </a:bodyPr>
+          <a:lstStyle/>
+          <a:p>
+            <a:pPr algn="l"/>
+            <a:r>
+              <a:rPr sz="3000" b="1">
+                <a:solidFill>
+                  <a:srgbClr val="5BB5BE"/>
+                </a:solidFill>
+                <a:latin typeface="Cambria"/>
+              </a:rPr>
+              <a:t>Summary</a:t>
+            </a:r>
+          </a:p>
+        </p:txBody>
+      </p:sp>
+      <p:sp>
+        <p:nvSpPr>
+          <p:cNvPr id="4" name="Rectangle 3"/>
+          <p:cNvSpPr/>
+          <p:nvPr/>
+        </p:nvSpPr>
+        <p:spPr>
+          <a:xfrm>
+            <a:off x="457200" y="1207008"/>
+            <a:ext cx="11247120" cy="8000"/>
+          </a:xfrm>
+          <a:prstGeom prst="rect">
+            <a:avLst/>
+          </a:prstGeom>
+          <a:solidFill>
+            <a:srgbClr val="CCCCCC"/>
+          </a:solidFill>
+          <a:ln>
+            <a:noFill/>
+          </a:ln>
+        </p:spPr>
+        <p:style>
+          <a:lnRef idx="1">
+            <a:schemeClr val="accent1"/>
+          </a:lnRef>
+          <a:fillRef idx="3">
+            <a:schemeClr val="accent1"/>
+          </a:fillRef>
+          <a:effectRef idx="2">
+            <a:schemeClr val="accent1"/>
+          </a:effectRef>
+          <a:fontRef idx="minor">
+            <a:schemeClr val="lt1"/>
+          </a:fontRef>
+        </p:style>
+        <p:txBody>
+          <a:bodyPr rtlCol="0" anchor="ctr"/>
+          <a:lstStyle/>
+          <a:p>
+            <a:pPr algn="ctr"/>
+          </a:p>
+        </p:txBody>
+      </p:sp>
+      <p:sp>
+        <p:nvSpPr>
+          <p:cNvPr id="5" name="Oval 4"/>
+          <p:cNvSpPr/>
+          <p:nvPr/>
+        </p:nvSpPr>
+        <p:spPr>
+          <a:xfrm>
+            <a:off x="640080" y="1645920"/>
+            <a:ext cx="731520" cy="731520"/>
+          </a:xfrm>
+          <a:prstGeom prst="ellipse">
+            <a:avLst/>
+          </a:prstGeom>
+          <a:solidFill>
+            <a:srgbClr val="5BB5BE"/>
+          </a:solidFill>
+          <a:ln>
+            <a:noFill/>
+          </a:ln>
+        </p:spPr>
+        <p:style>
+          <a:lnRef idx="1">
+            <a:schemeClr val="accent1"/>
+          </a:lnRef>
+          <a:fillRef idx="3">
+            <a:schemeClr val="accent1"/>
+          </a:fillRef>
+          <a:effectRef idx="2">
+            <a:schemeClr val="accent1"/>
+          </a:effectRef>
+          <a:fontRef idx="minor">
+            <a:schemeClr val="lt1"/>
+          </a:fontRef>
+        </p:style>
+        <p:txBody>
+          <a:bodyPr rtlCol="0" anchor="ctr"/>
+          <a:lstStyle/>
+          <a:p>
+            <a:pPr algn="ctr"/>
+          </a:p>
+        </p:txBody>
+      </p:sp>
+      <p:sp>
+        <p:nvSpPr>
+          <p:cNvPr id="6" name="TextBox 5"/>
+          <p:cNvSpPr txBox="1"/>
+          <p:nvPr/>
+        </p:nvSpPr>
+        <p:spPr>
+          <a:xfrm>
+            <a:off x="640080" y="1709928"/>
+            <a:ext cx="731520" cy="594360"/>
+          </a:xfrm>
+          <a:prstGeom prst="rect">
+            <a:avLst/>
+          </a:prstGeom>
+          <a:noFill/>
+        </p:spPr>
+        <p:txBody>
+          <a:bodyPr wrap="square" lIns="0" rIns="0" tIns="0" bIns="0" anchor="t">
+            <a:spAutoFit/>
+          </a:bodyPr>
+          <a:lstStyle/>
+          <a:p>
+            <a:pPr algn="ctr"/>
+            <a:r>
+              <a:rPr sz="2200" b="1">
+                <a:solidFill>
+                  <a:srgbClr val="FFFFFF"/>
+                </a:solidFill>
+                <a:latin typeface="Cambria"/>
+              </a:rPr>
+              <a:t>01</a:t>
+            </a:r>
+          </a:p>
+        </p:txBody>
+      </p:sp>
+      <p:sp>
+        <p:nvSpPr>
+          <p:cNvPr id="7" name="Rounded Rectangle 6"/>
+          <p:cNvSpPr/>
+          <p:nvPr/>
+        </p:nvSpPr>
+        <p:spPr>
+          <a:xfrm>
+            <a:off x="1645920" y="1463040"/>
+            <a:ext cx="10058400" cy="1188720"/>
+          </a:xfrm>
+          <a:prstGeom prst="roundRect">
+            <a:avLst>
+              <a:gd name="adj" fmla="val 8000"/>
+            </a:avLst>
+          </a:prstGeom>
+          <a:solidFill>
+            <a:srgbClr val="4E4E4E"/>
+          </a:solidFill>
+          <a:ln>
+            <a:noFill/>
+          </a:ln>
+          <a:effectLst/>
+        </p:spPr>
+        <p:style>
+          <a:lnRef idx="1">
+            <a:schemeClr val="accent1"/>
+          </a:lnRef>
+          <a:fillRef idx="3">
+            <a:schemeClr val="accent1"/>
+          </a:fillRef>
+          <a:effectRef idx="2">
+            <a:schemeClr val="accent1"/>
+          </a:effectRef>
+          <a:fontRef idx="minor">
+            <a:schemeClr val="lt1"/>
+          </a:fontRef>
+        </p:style>
+        <p:txBody>
+          <a:bodyPr rtlCol="0" anchor="ctr" lIns="0" rIns="0" tIns="0" bIns="0"/>
+          <a:lstStyle/>
+          <a:p>
+            <a:pPr algn="ctr"/>
+          </a:p>
+        </p:txBody>
+      </p:sp>
+      <p:sp>
+        <p:nvSpPr>
+          <p:cNvPr id="8" name="TextBox 7"/>
+          <p:cNvSpPr txBox="1"/>
+          <p:nvPr/>
+        </p:nvSpPr>
+        <p:spPr>
+          <a:xfrm>
+            <a:off x="1828800" y="1600200"/>
+            <a:ext cx="9601200" cy="457200"/>
+          </a:xfrm>
+          <a:prstGeom prst="rect">
+            <a:avLst/>
+          </a:prstGeom>
+          <a:noFill/>
+        </p:spPr>
+        <p:txBody>
+          <a:bodyPr wrap="square" lIns="0" rIns="0" tIns="0" bIns="0" anchor="t">
+            <a:spAutoFit/>
+          </a:bodyPr>
+          <a:lstStyle/>
+          <a:p>
+            <a:pPr algn="l"/>
+            <a:r>
+              <a:rPr sz="1800" b="1">
+                <a:solidFill>
+                  <a:srgbClr val="E8A87C"/>
+                </a:solidFill>
+                <a:latin typeface="Cambria"/>
+              </a:rPr>
+              <a:t>Two regularizers, fully swept</a:t>
+            </a:r>
+          </a:p>
+        </p:txBody>
+      </p:sp>
+      <p:sp>
+        <p:nvSpPr>
+          <p:cNvPr id="9" name="TextBox 8"/>
+          <p:cNvSpPr txBox="1"/>
+          <p:nvPr/>
+        </p:nvSpPr>
+        <p:spPr>
+          <a:xfrm>
+            <a:off x="1828800" y="2057400"/>
+            <a:ext cx="9784080" cy="640080"/>
+          </a:xfrm>
+          <a:prstGeom prst="rect">
+            <a:avLst/>
+          </a:prstGeom>
+          <a:noFill/>
+        </p:spPr>
+        <p:txBody>
+          <a:bodyPr wrap="square" lIns="0" rIns="0" tIns="0" bIns="0" anchor="t">
+            <a:spAutoFit/>
+          </a:bodyPr>
+          <a:lstStyle/>
+          <a:p>
+            <a:pPr algn="l"/>
+            <a:r>
+              <a:rPr sz="1400" b="0">
+                <a:solidFill>
+                  <a:srgbClr val="FFFFFF"/>
+                </a:solidFill>
+                <a:latin typeface="Calibri"/>
+              </a:rPr>
+              <a:t>Maximum Entropy (λ, 8 points) and Label Smoothing (α, 7 points), both vs the CTC baseline, all under identical training settings.</a:t>
+            </a:r>
+          </a:p>
+        </p:txBody>
+      </p:sp>
+      <p:sp>
+        <p:nvSpPr>
+          <p:cNvPr id="10" name="Oval 9"/>
+          <p:cNvSpPr/>
+          <p:nvPr/>
+        </p:nvSpPr>
+        <p:spPr>
+          <a:xfrm>
+            <a:off x="640080" y="3063240"/>
+            <a:ext cx="731520" cy="731520"/>
+          </a:xfrm>
+          <a:prstGeom prst="ellipse">
+            <a:avLst/>
+          </a:prstGeom>
+          <a:solidFill>
+            <a:srgbClr val="5BB5BE"/>
+          </a:solidFill>
+          <a:ln>
+            <a:noFill/>
+          </a:ln>
+        </p:spPr>
+        <p:style>
+          <a:lnRef idx="1">
+            <a:schemeClr val="accent1"/>
+          </a:lnRef>
+          <a:fillRef idx="3">
+            <a:schemeClr val="accent1"/>
+          </a:fillRef>
+          <a:effectRef idx="2">
+            <a:schemeClr val="accent1"/>
+          </a:effectRef>
+          <a:fontRef idx="minor">
+            <a:schemeClr val="lt1"/>
+          </a:fontRef>
+        </p:style>
+        <p:txBody>
+          <a:bodyPr rtlCol="0" anchor="ctr"/>
+          <a:lstStyle/>
+          <a:p>
+            <a:pPr algn="ctr"/>
+          </a:p>
+        </p:txBody>
+      </p:sp>
+      <p:sp>
+        <p:nvSpPr>
+          <p:cNvPr id="11" name="TextBox 10"/>
+          <p:cNvSpPr txBox="1"/>
+          <p:nvPr/>
+        </p:nvSpPr>
+        <p:spPr>
+          <a:xfrm>
+            <a:off x="640080" y="3127248"/>
+            <a:ext cx="731520" cy="594360"/>
+          </a:xfrm>
+          <a:prstGeom prst="rect">
+            <a:avLst/>
+          </a:prstGeom>
+          <a:noFill/>
+        </p:spPr>
+        <p:txBody>
+          <a:bodyPr wrap="square" lIns="0" rIns="0" tIns="0" bIns="0" anchor="t">
+            <a:spAutoFit/>
+          </a:bodyPr>
+          <a:lstStyle/>
+          <a:p>
+            <a:pPr algn="ctr"/>
+            <a:r>
+              <a:rPr sz="2200" b="1">
+                <a:solidFill>
+                  <a:srgbClr val="FFFFFF"/>
+                </a:solidFill>
+                <a:latin typeface="Cambria"/>
+              </a:rPr>
+              <a:t>02</a:t>
+            </a:r>
+          </a:p>
+        </p:txBody>
+      </p:sp>
+      <p:sp>
+        <p:nvSpPr>
+          <p:cNvPr id="12" name="Rounded Rectangle 11"/>
+          <p:cNvSpPr/>
+          <p:nvPr/>
+        </p:nvSpPr>
+        <p:spPr>
+          <a:xfrm>
+            <a:off x="1645920" y="2880360"/>
+            <a:ext cx="10058400" cy="1188720"/>
+          </a:xfrm>
+          <a:prstGeom prst="roundRect">
+            <a:avLst>
+              <a:gd name="adj" fmla="val 8000"/>
+            </a:avLst>
+          </a:prstGeom>
+          <a:solidFill>
+            <a:srgbClr val="4E4E4E"/>
+          </a:solidFill>
+          <a:ln>
+            <a:noFill/>
+          </a:ln>
+          <a:effectLst/>
+        </p:spPr>
+        <p:style>
+          <a:lnRef idx="1">
+            <a:schemeClr val="accent1"/>
+          </a:lnRef>
+          <a:fillRef idx="3">
+            <a:schemeClr val="accent1"/>
+          </a:fillRef>
+          <a:effectRef idx="2">
+            <a:schemeClr val="accent1"/>
+          </a:effectRef>
+          <a:fontRef idx="minor">
+            <a:schemeClr val="lt1"/>
+          </a:fontRef>
+        </p:style>
+        <p:txBody>
+          <a:bodyPr rtlCol="0" anchor="ctr" lIns="0" rIns="0" tIns="0" bIns="0"/>
+          <a:lstStyle/>
+          <a:p>
+            <a:pPr algn="ctr"/>
+          </a:p>
+        </p:txBody>
+      </p:sp>
+      <p:sp>
+        <p:nvSpPr>
+          <p:cNvPr id="13" name="TextBox 12"/>
+          <p:cNvSpPr txBox="1"/>
+          <p:nvPr/>
+        </p:nvSpPr>
+        <p:spPr>
+          <a:xfrm>
+            <a:off x="1828800" y="3017520"/>
+            <a:ext cx="9601200" cy="457200"/>
+          </a:xfrm>
+          <a:prstGeom prst="rect">
+            <a:avLst/>
+          </a:prstGeom>
+          <a:noFill/>
+        </p:spPr>
+        <p:txBody>
+          <a:bodyPr wrap="square" lIns="0" rIns="0" tIns="0" bIns="0" anchor="t">
+            <a:spAutoFit/>
+          </a:bodyPr>
+          <a:lstStyle/>
+          <a:p>
+            <a:pPr algn="l"/>
+            <a:r>
+              <a:rPr sz="1800" b="1">
+                <a:solidFill>
+                  <a:srgbClr val="E8A87C"/>
+                </a:solidFill>
+                <a:latin typeface="Cambria"/>
+              </a:rPr>
+              <a:t>Label Smoothing wins</a:t>
+            </a:r>
+          </a:p>
+        </p:txBody>
+      </p:sp>
+      <p:sp>
+        <p:nvSpPr>
+          <p:cNvPr id="14" name="TextBox 13"/>
+          <p:cNvSpPr txBox="1"/>
+          <p:nvPr/>
+        </p:nvSpPr>
+        <p:spPr>
+          <a:xfrm>
+            <a:off x="1828800" y="3474720"/>
+            <a:ext cx="9784080" cy="640080"/>
+          </a:xfrm>
+          <a:prstGeom prst="rect">
+            <a:avLst/>
+          </a:prstGeom>
+          <a:noFill/>
+        </p:spPr>
+        <p:txBody>
+          <a:bodyPr wrap="square" lIns="0" rIns="0" tIns="0" bIns="0" anchor="t">
+            <a:spAutoFit/>
+          </a:bodyPr>
+          <a:lstStyle/>
+          <a:p>
+            <a:pPr algn="l"/>
+            <a:r>
+              <a:rPr sz="1400" b="0">
+                <a:solidFill>
+                  <a:srgbClr val="FFFFFF"/>
+                </a:solidFill>
+                <a:latin typeface="Calibri"/>
+              </a:rPr>
+              <a:t>Best α=0.10 → 19.51 / 28.30. Beats baseline by −1.65 / −1.87 pp and the best MaxEnt (λ=0.15) by −0.37 / −0.33 pp.</a:t>
+            </a:r>
+          </a:p>
+        </p:txBody>
+      </p:sp>
+      <p:sp>
+        <p:nvSpPr>
+          <p:cNvPr id="15" name="Oval 14"/>
+          <p:cNvSpPr/>
+          <p:nvPr/>
+        </p:nvSpPr>
+        <p:spPr>
+          <a:xfrm>
+            <a:off x="640080" y="4480560"/>
+            <a:ext cx="731520" cy="731520"/>
+          </a:xfrm>
+          <a:prstGeom prst="ellipse">
+            <a:avLst/>
+          </a:prstGeom>
+          <a:solidFill>
+            <a:srgbClr val="5BB5BE"/>
+          </a:solidFill>
+          <a:ln>
+            <a:noFill/>
+          </a:ln>
+        </p:spPr>
+        <p:style>
+          <a:lnRef idx="1">
+            <a:schemeClr val="accent1"/>
+          </a:lnRef>
+          <a:fillRef idx="3">
+            <a:schemeClr val="accent1"/>
+          </a:fillRef>
+          <a:effectRef idx="2">
+            <a:schemeClr val="accent1"/>
+          </a:effectRef>
+          <a:fontRef idx="minor">
+            <a:schemeClr val="lt1"/>
+          </a:fontRef>
+        </p:style>
+        <p:txBody>
+          <a:bodyPr rtlCol="0" anchor="ctr"/>
+          <a:lstStyle/>
+          <a:p>
+            <a:pPr algn="ctr"/>
+          </a:p>
+        </p:txBody>
+      </p:sp>
+      <p:sp>
+        <p:nvSpPr>
+          <p:cNvPr id="16" name="TextBox 15"/>
+          <p:cNvSpPr txBox="1"/>
+          <p:nvPr/>
+        </p:nvSpPr>
+        <p:spPr>
+          <a:xfrm>
+            <a:off x="640080" y="4544568"/>
+            <a:ext cx="731520" cy="594360"/>
+          </a:xfrm>
+          <a:prstGeom prst="rect">
+            <a:avLst/>
+          </a:prstGeom>
+          <a:noFill/>
+        </p:spPr>
+        <p:txBody>
+          <a:bodyPr wrap="square" lIns="0" rIns="0" tIns="0" bIns="0" anchor="t">
+            <a:spAutoFit/>
+          </a:bodyPr>
+          <a:lstStyle/>
+          <a:p>
+            <a:pPr algn="ctr"/>
+            <a:r>
+              <a:rPr sz="2200" b="1">
+                <a:solidFill>
+                  <a:srgbClr val="FFFFFF"/>
+                </a:solidFill>
+                <a:latin typeface="Cambria"/>
+              </a:rPr>
+              <a:t>03</a:t>
+            </a:r>
+          </a:p>
+        </p:txBody>
+      </p:sp>
+      <p:sp>
+        <p:nvSpPr>
+          <p:cNvPr id="17" name="Rounded Rectangle 16"/>
+          <p:cNvSpPr/>
+          <p:nvPr/>
+        </p:nvSpPr>
+        <p:spPr>
+          <a:xfrm>
+            <a:off x="1645920" y="4297680"/>
+            <a:ext cx="10058400" cy="1188720"/>
+          </a:xfrm>
+          <a:prstGeom prst="roundRect">
+            <a:avLst>
+              <a:gd name="adj" fmla="val 8000"/>
+            </a:avLst>
+          </a:prstGeom>
+          <a:solidFill>
+            <a:srgbClr val="4E4E4E"/>
+          </a:solidFill>
+          <a:ln>
+            <a:noFill/>
+          </a:ln>
+          <a:effectLst/>
+        </p:spPr>
+        <p:style>
+          <a:lnRef idx="1">
+            <a:schemeClr val="accent1"/>
+          </a:lnRef>
+          <a:fillRef idx="3">
+            <a:schemeClr val="accent1"/>
+          </a:fillRef>
+          <a:effectRef idx="2">
+            <a:schemeClr val="accent1"/>
+          </a:effectRef>
+          <a:fontRef idx="minor">
+            <a:schemeClr val="lt1"/>
+          </a:fontRef>
+        </p:style>
+        <p:txBody>
+          <a:bodyPr rtlCol="0" anchor="ctr" lIns="0" rIns="0" tIns="0" bIns="0"/>
+          <a:lstStyle/>
+          <a:p>
+            <a:pPr algn="ctr"/>
+          </a:p>
+        </p:txBody>
+      </p:sp>
+      <p:sp>
+        <p:nvSpPr>
+          <p:cNvPr id="18" name="TextBox 17"/>
+          <p:cNvSpPr txBox="1"/>
+          <p:nvPr/>
+        </p:nvSpPr>
+        <p:spPr>
+          <a:xfrm>
+            <a:off x="1828800" y="4434840"/>
+            <a:ext cx="9601200" cy="457200"/>
+          </a:xfrm>
+          <a:prstGeom prst="rect">
+            <a:avLst/>
+          </a:prstGeom>
+          <a:noFill/>
+        </p:spPr>
+        <p:txBody>
+          <a:bodyPr wrap="square" lIns="0" rIns="0" tIns="0" bIns="0" anchor="t">
+            <a:spAutoFit/>
+          </a:bodyPr>
+          <a:lstStyle/>
+          <a:p>
+            <a:pPr algn="l"/>
+            <a:r>
+              <a:rPr sz="1800" b="1">
+                <a:solidFill>
+                  <a:srgbClr val="E8A87C"/>
+                </a:solidFill>
+                <a:latin typeface="Cambria"/>
+              </a:rPr>
+              <a:t>Different curve shapes</a:t>
+            </a:r>
+          </a:p>
+        </p:txBody>
+      </p:sp>
+      <p:sp>
+        <p:nvSpPr>
+          <p:cNvPr id="19" name="TextBox 18"/>
+          <p:cNvSpPr txBox="1"/>
+          <p:nvPr/>
+        </p:nvSpPr>
+        <p:spPr>
+          <a:xfrm>
+            <a:off x="1828800" y="4892040"/>
+            <a:ext cx="9784080" cy="640080"/>
+          </a:xfrm>
+          <a:prstGeom prst="rect">
+            <a:avLst/>
+          </a:prstGeom>
+          <a:noFill/>
+        </p:spPr>
+        <p:txBody>
+          <a:bodyPr wrap="square" lIns="0" rIns="0" tIns="0" bIns="0" anchor="t">
+            <a:spAutoFit/>
+          </a:bodyPr>
+          <a:lstStyle/>
+          <a:p>
+            <a:pPr algn="l"/>
+            <a:r>
+              <a:rPr sz="1400" b="0">
+                <a:solidFill>
+                  <a:srgbClr val="FFFFFF"/>
+                </a:solidFill>
+                <a:latin typeface="Calibri"/>
+              </a:rPr>
+              <a:t>LS has a sharp optimum at α=0.10 (sensitive); MaxEnt plateaus over λ=0.15–0.20 (robust but lower peak). Gains largest on test-other.</a:t>
+            </a:r>
+          </a:p>
+        </p:txBody>
+      </p:sp>
+      <p:sp>
+        <p:nvSpPr>
+          <p:cNvPr id="20" name="TextBox 19"/>
+          <p:cNvSpPr txBox="1"/>
+          <p:nvPr/>
+        </p:nvSpPr>
+        <p:spPr>
+          <a:xfrm>
+            <a:off x="457200" y="5943600"/>
+            <a:ext cx="11247120" cy="365760"/>
+          </a:xfrm>
+          <a:prstGeom prst="rect">
+            <a:avLst/>
+          </a:prstGeom>
+          <a:noFill/>
+        </p:spPr>
+        <p:txBody>
+          <a:bodyPr wrap="square" lIns="0" rIns="0" tIns="0" bIns="0" anchor="t">
+            <a:spAutoFit/>
+          </a:bodyPr>
+          <a:lstStyle/>
+          <a:p>
+            <a:pPr algn="ctr"/>
+            <a:r>
+              <a:rPr sz="1300" b="0">
+                <a:solidFill>
+                  <a:srgbClr val="F5C86E"/>
+                </a:solidFill>
+                <a:latin typeface="Cambria"/>
+              </a:rPr>
+              <a:t>Future: combine LS + MaxEnt, SpecAugment data augmentation, LM shallow fusion, multi-seed runs.</a:t>
+            </a:r>
+          </a:p>
+        </p:txBody>
+      </p:sp>
+      <p:sp>
+        <p:nvSpPr>
+          <p:cNvPr id="21" name="TextBox 20"/>
+          <p:cNvSpPr txBox="1"/>
+          <p:nvPr/>
+        </p:nvSpPr>
+        <p:spPr>
+          <a:xfrm>
+            <a:off x="5852160" y="6446520"/>
+            <a:ext cx="457200" cy="274320"/>
+          </a:xfrm>
+          <a:prstGeom prst="rect">
+            <a:avLst/>
+          </a:prstGeom>
+          <a:noFill/>
+        </p:spPr>
+        <p:txBody>
+          <a:bodyPr wrap="square" lIns="0" rIns="0" tIns="0" bIns="0" anchor="t">
+            <a:spAutoFit/>
+          </a:bodyPr>
+          <a:lstStyle/>
+          <a:p>
+            <a:pPr algn="ctr"/>
+            <a:r>
+              <a:rPr sz="1000" b="0">
+                <a:solidFill>
+                  <a:srgbClr val="999999"/>
+                </a:solidFill>
+                <a:latin typeface="Calibri"/>
+              </a:rPr>
+              <a:t>11</a:t>
+            </a:r>
+          </a:p>
+        </p:txBody>
+      </p:sp>
+      <p:sp>
+        <p:nvSpPr>
+          <p:cNvPr id="22" name="TextBox 21"/>
+          <p:cNvSpPr txBox="1"/>
+          <p:nvPr/>
+        </p:nvSpPr>
+        <p:spPr>
+          <a:xfrm>
+            <a:off x="457200" y="6446520"/>
+            <a:ext cx="5486400" cy="274320"/>
+          </a:xfrm>
+          <a:prstGeom prst="rect">
+            <a:avLst/>
+          </a:prstGeom>
+          <a:noFill/>
+        </p:spPr>
+        <p:txBody>
+          <a:bodyPr wrap="square" lIns="0" rIns="0" tIns="0" bIns="0" anchor="t">
+            <a:spAutoFit/>
+          </a:bodyPr>
+          <a:lstStyle/>
+          <a:p>
+            <a:pPr algn="l"/>
+            <a:r>
+              <a:rPr sz="1000" b="0">
+                <a:solidFill>
+                  <a:srgbClr val="999999"/>
+                </a:solidFill>
+                <a:latin typeface="Calibri"/>
+              </a:rPr>
+              <a:t>XAI 509 — Wav2Vec2 CTC Fine-Tuning Project</a:t>
+            </a:r>
+          </a:p>
+        </p:txBody>
+      </p:sp>
+    </p:spTree>
+  </p:cSld>
+  <p:clrMapOvr>
+    <a:masterClrMapping/>
+  </p:clrMapOvr>
+</p:sld>
+</file>
+
+<file path=ppt/slides/slide12.xml><?xml version="1.0" encoding="utf-8"?>
+<p:sld xmlns:a="http://schemas.openxmlformats.org/drawingml/2006/main" xmlns:p="http://schemas.openxmlformats.org/presentationml/2006/main" xmlns:r="http://schemas.openxmlformats.org/officeDocument/2006/relationships">
+  <p:cSld>
+    <p:spTree>
+      <p:nvGrpSpPr>
+        <p:cNvPr id="1" name=""/>
+        <p:cNvGrpSpPr/>
+        <p:nvPr/>
+      </p:nvGrpSpPr>
+      <p:grpSpPr/>
+      <p:sp>
+        <p:nvSpPr>
+          <p:cNvPr id="2" name="Rectangle 1"/>
+          <p:cNvSpPr/>
+          <p:nvPr/>
+        </p:nvSpPr>
+        <p:spPr>
+          <a:xfrm>
+            <a:off x="0" y="0"/>
+            <a:ext cx="12191695" cy="6858000"/>
+          </a:xfrm>
+          <a:prstGeom prst="rect">
+            <a:avLst/>
+          </a:prstGeom>
+          <a:solidFill>
             <a:srgbClr val="323232"/>
           </a:solidFill>
           <a:ln>
@@ -4964,7 +6016,7 @@
                 </a:solidFill>
                 <a:latin typeface="Cambria"/>
               </a:rPr>
-              <a:t>MaxEnt λ Sweep &amp; Analysis</a:t>
+              <a:t>MaxEnt + LS Sweeps &amp; Analysis</a:t>
             </a:r>
           </a:p>
         </p:txBody>
@@ -10167,7 +11219,7 @@
                 </a:solidFill>
                 <a:latin typeface="Calibri"/>
               </a:rPr>
-              <a:t>Maximum Entropy (λ = 0.10)</a:t>
+              <a:t>Maximum Entropy (best, λ = 0.15)</a:t>
             </a:r>
           </a:p>
         </p:txBody>
@@ -10202,7 +11254,7 @@
                 </a:solidFill>
                 <a:latin typeface="Consolas"/>
               </a:rPr>
-              <a:t>19.93</a:t>
+              <a:t>19.88</a:t>
             </a:r>
           </a:p>
         </p:txBody>
@@ -10237,7 +11289,7 @@
                 </a:solidFill>
                 <a:latin typeface="Consolas"/>
               </a:rPr>
-              <a:t>28.80</a:t>
+              <a:t>28.63</a:t>
             </a:r>
           </a:p>
         </p:txBody>
@@ -10272,7 +11324,7 @@
                 </a:solidFill>
                 <a:latin typeface="Consolas"/>
               </a:rPr>
-              <a:t>−1.37</a:t>
+              <a:t>−1.54</a:t>
             </a:r>
           </a:p>
         </p:txBody>
@@ -10351,7 +11403,7 @@
                 </a:solidFill>
                 <a:latin typeface="Calibri"/>
               </a:rPr>
-              <a:t>Label Smoothing (α = 0.10)</a:t>
+              <a:t>Label Smoothing (best, α = 0.10)</a:t>
             </a:r>
           </a:p>
         </p:txBody>
@@ -10576,7 +11628,7 @@
                 </a:solidFill>
                 <a:latin typeface="Calibri"/>
               </a:rPr>
-              <a:t>● Both regularizers </a:t>
+              <a:t>● Both regularizers beat baseline by </a:t>
             </a:r>
             <a:r>
               <a:rPr sz="1400" b="1" i="0">
@@ -10585,7 +11637,7 @@
                 </a:solidFill>
                 <a:latin typeface="Calibri"/>
               </a:rPr>
-              <a:t>beat baseline by &gt; 1 pp</a:t>
+              <a:t>&gt; 1.5 pp</a:t>
             </a:r>
             <a:r>
               <a:rPr sz="1400" b="0" i="0">
@@ -10594,7 +11646,7 @@
                 </a:solidFill>
                 <a:latin typeface="Calibri"/>
               </a:rPr>
-              <a:t> on both splits.
+              <a:t> on both splits (best operating points).
 </a:t>
             </a:r>
             <a:r>
@@ -10604,7 +11656,7 @@
                 </a:solidFill>
                 <a:latin typeface="Calibri"/>
               </a:rPr>
-              <a:t>● Label Smoothing &gt; MaxEnt by </a:t>
+              <a:t>● Label Smoothing (α=0.10) is the overall winner — </a:t>
             </a:r>
             <a:r>
               <a:rPr sz="1400" b="1" i="0">
@@ -10613,7 +11665,7 @@
                 </a:solidFill>
                 <a:latin typeface="Calibri"/>
               </a:rPr>
-              <a:t>0.42 pp (clean) / 0.50 pp (other)</a:t>
+              <a:t>0.37 pp (clean) / 0.33 pp (other) ahead of MaxEnt</a:t>
             </a:r>
             <a:r>
               <a:rPr sz="1400" b="0" i="0">
@@ -10632,7 +11684,7 @@
                 </a:solidFill>
                 <a:latin typeface="Calibri"/>
               </a:rPr>
-              <a:t>● Larger improvement on </a:t>
+              <a:t>● Each curve was tuned by a full sweep (next slides): </a:t>
             </a:r>
             <a:r>
               <a:rPr sz="1400" b="1" i="0">
@@ -10641,7 +11693,7 @@
                 </a:solidFill>
                 <a:latin typeface="Calibri"/>
               </a:rPr>
-              <a:t>test-other (harder set)</a:t>
+              <a:t>LS peaks sharply at 0.10, MaxEnt plateaus at 0.15–0.20</a:t>
             </a:r>
             <a:r>
               <a:rPr sz="1400" b="0" i="0">
@@ -10650,7 +11702,7 @@
                 </a:solidFill>
                 <a:latin typeface="Calibri"/>
               </a:rPr>
-              <a:t> — regularization helps generalization most where it matters.</a:t>
+              <a:t>.</a:t>
             </a:r>
           </a:p>
         </p:txBody>
@@ -11101,7 +12153,7 @@
         <p:spPr>
           <a:xfrm>
             <a:off x="640080" y="2103120"/>
-            <a:ext cx="5943600" cy="457200"/>
+            <a:ext cx="5943600" cy="420624"/>
           </a:xfrm>
           <a:prstGeom prst="rect">
             <a:avLst/>
@@ -11144,7 +12196,7 @@
         </p:nvSpPr>
         <p:spPr>
           <a:xfrm>
-            <a:off x="822960" y="2167128"/>
+            <a:off x="822960" y="2148840"/>
             <a:ext cx="1371600" cy="365760"/>
           </a:xfrm>
           <a:prstGeom prst="rect">
@@ -11179,7 +12231,7 @@
         </p:nvSpPr>
         <p:spPr>
           <a:xfrm>
-            <a:off x="2194560" y="2167128"/>
+            <a:off x="2194560" y="2148840"/>
             <a:ext cx="2194560" cy="365760"/>
           </a:xfrm>
           <a:prstGeom prst="rect">
@@ -11214,7 +12266,7 @@
         </p:nvSpPr>
         <p:spPr>
           <a:xfrm>
-            <a:off x="4389120" y="2167128"/>
+            <a:off x="4389120" y="2148840"/>
             <a:ext cx="2194560" cy="365760"/>
           </a:xfrm>
           <a:prstGeom prst="rect">
@@ -11249,8 +12301,8 @@
         </p:nvSpPr>
         <p:spPr>
           <a:xfrm>
-            <a:off x="640080" y="2606039"/>
-            <a:ext cx="5943600" cy="457200"/>
+            <a:off x="640080" y="2560320"/>
+            <a:ext cx="5943600" cy="420624"/>
           </a:xfrm>
           <a:prstGeom prst="rect">
             <a:avLst/>
@@ -11293,7 +12345,7 @@
         </p:nvSpPr>
         <p:spPr>
           <a:xfrm>
-            <a:off x="822960" y="2670047"/>
+            <a:off x="822960" y="2606040"/>
             <a:ext cx="1371600" cy="365760"/>
           </a:xfrm>
           <a:prstGeom prst="rect">
@@ -11328,7 +12380,7 @@
         </p:nvSpPr>
         <p:spPr>
           <a:xfrm>
-            <a:off x="2194560" y="2670047"/>
+            <a:off x="2194560" y="2606040"/>
             <a:ext cx="2194560" cy="365760"/>
           </a:xfrm>
           <a:prstGeom prst="rect">
@@ -11363,7 +12415,7 @@
         </p:nvSpPr>
         <p:spPr>
           <a:xfrm>
-            <a:off x="4389120" y="2670047"/>
+            <a:off x="4389120" y="2606040"/>
             <a:ext cx="2194560" cy="365760"/>
           </a:xfrm>
           <a:prstGeom prst="rect">
@@ -11398,8 +12450,8 @@
         </p:nvSpPr>
         <p:spPr>
           <a:xfrm>
-            <a:off x="640080" y="3108960"/>
-            <a:ext cx="5943600" cy="457200"/>
+            <a:off x="640080" y="3017520"/>
+            <a:ext cx="5943600" cy="420624"/>
           </a:xfrm>
           <a:prstGeom prst="rect">
             <a:avLst/>
@@ -11442,7 +12494,7 @@
         </p:nvSpPr>
         <p:spPr>
           <a:xfrm>
-            <a:off x="822960" y="3172968"/>
+            <a:off x="822960" y="3063240"/>
             <a:ext cx="1371600" cy="365760"/>
           </a:xfrm>
           <a:prstGeom prst="rect">
@@ -11477,7 +12529,7 @@
         </p:nvSpPr>
         <p:spPr>
           <a:xfrm>
-            <a:off x="2194560" y="3172968"/>
+            <a:off x="2194560" y="3063240"/>
             <a:ext cx="2194560" cy="365760"/>
           </a:xfrm>
           <a:prstGeom prst="rect">
@@ -11512,7 +12564,7 @@
         </p:nvSpPr>
         <p:spPr>
           <a:xfrm>
-            <a:off x="4389120" y="3172968"/>
+            <a:off x="4389120" y="3063240"/>
             <a:ext cx="2194560" cy="365760"/>
           </a:xfrm>
           <a:prstGeom prst="rect">
@@ -11547,8 +12599,8 @@
         </p:nvSpPr>
         <p:spPr>
           <a:xfrm>
-            <a:off x="640080" y="3611880"/>
-            <a:ext cx="5943600" cy="457200"/>
+            <a:off x="640080" y="3474720"/>
+            <a:ext cx="5943600" cy="420624"/>
           </a:xfrm>
           <a:prstGeom prst="rect">
             <a:avLst/>
@@ -11591,7 +12643,7 @@
         </p:nvSpPr>
         <p:spPr>
           <a:xfrm>
-            <a:off x="822960" y="3675888"/>
+            <a:off x="822960" y="3520440"/>
             <a:ext cx="1371600" cy="365760"/>
           </a:xfrm>
           <a:prstGeom prst="rect">
@@ -11626,7 +12678,7 @@
         </p:nvSpPr>
         <p:spPr>
           <a:xfrm>
-            <a:off x="2194560" y="3675888"/>
+            <a:off x="2194560" y="3520440"/>
             <a:ext cx="2194560" cy="365760"/>
           </a:xfrm>
           <a:prstGeom prst="rect">
@@ -11661,7 +12713,7 @@
         </p:nvSpPr>
         <p:spPr>
           <a:xfrm>
-            <a:off x="4389120" y="3675888"/>
+            <a:off x="4389120" y="3520440"/>
             <a:ext cx="2194560" cy="365760"/>
           </a:xfrm>
           <a:prstGeom prst="rect">
@@ -11696,8 +12748,8 @@
         </p:nvSpPr>
         <p:spPr>
           <a:xfrm>
-            <a:off x="640080" y="4114800"/>
-            <a:ext cx="5943600" cy="457200"/>
+            <a:off x="640080" y="3931920"/>
+            <a:ext cx="5943600" cy="420624"/>
           </a:xfrm>
           <a:prstGeom prst="rect">
             <a:avLst/>
@@ -11740,7 +12792,7 @@
         </p:nvSpPr>
         <p:spPr>
           <a:xfrm>
-            <a:off x="822960" y="4178808"/>
+            <a:off x="822960" y="3977640"/>
             <a:ext cx="1371600" cy="365760"/>
           </a:xfrm>
           <a:prstGeom prst="rect">
@@ -11775,7 +12827,7 @@
         </p:nvSpPr>
         <p:spPr>
           <a:xfrm>
-            <a:off x="2194560" y="4178808"/>
+            <a:off x="2194560" y="3977640"/>
             <a:ext cx="2194560" cy="365760"/>
           </a:xfrm>
           <a:prstGeom prst="rect">
@@ -11810,7 +12862,7 @@
         </p:nvSpPr>
         <p:spPr>
           <a:xfrm>
-            <a:off x="4389120" y="4178808"/>
+            <a:off x="4389120" y="3977640"/>
             <a:ext cx="2194560" cy="365760"/>
           </a:xfrm>
           <a:prstGeom prst="rect">
@@ -11845,8 +12897,157 @@
         </p:nvSpPr>
         <p:spPr>
           <a:xfrm>
-            <a:off x="640080" y="4617720"/>
-            <a:ext cx="5943600" cy="457200"/>
+            <a:off x="640080" y="4389120"/>
+            <a:ext cx="5943600" cy="420624"/>
+          </a:xfrm>
+          <a:prstGeom prst="rect">
+            <a:avLst/>
+          </a:prstGeom>
+          <a:solidFill>
+            <a:srgbClr val="555555"/>
+          </a:solidFill>
+          <a:ln>
+            <a:noFill/>
+          </a:ln>
+          <a:effectLst/>
+        </p:spPr>
+        <p:style>
+          <a:lnRef idx="1">
+            <a:schemeClr val="accent1"/>
+          </a:lnRef>
+          <a:fillRef idx="3">
+            <a:schemeClr val="accent1"/>
+          </a:fillRef>
+          <a:effectRef idx="2">
+            <a:schemeClr val="accent1"/>
+          </a:effectRef>
+          <a:fontRef idx="minor">
+            <a:schemeClr val="lt1"/>
+          </a:fontRef>
+        </p:style>
+        <p:txBody>
+          <a:bodyPr rtlCol="0" anchor="ctr" lIns="0" rIns="0" tIns="0" bIns="0"/>
+          <a:lstStyle/>
+          <a:p>
+            <a:pPr algn="ctr"/>
+          </a:p>
+        </p:txBody>
+      </p:sp>
+      <p:sp>
+        <p:nvSpPr>
+          <p:cNvPr id="32" name="TextBox 31"/>
+          <p:cNvSpPr txBox="1"/>
+          <p:nvPr/>
+        </p:nvSpPr>
+        <p:spPr>
+          <a:xfrm>
+            <a:off x="822960" y="4434840"/>
+            <a:ext cx="1371600" cy="365760"/>
+          </a:xfrm>
+          <a:prstGeom prst="rect">
+            <a:avLst/>
+          </a:prstGeom>
+          <a:noFill/>
+        </p:spPr>
+        <p:txBody>
+          <a:bodyPr wrap="square" lIns="0" rIns="0" tIns="0" bIns="0" anchor="t">
+            <a:spAutoFit/>
+          </a:bodyPr>
+          <a:lstStyle/>
+          <a:p>
+            <a:pPr algn="ctr"/>
+            <a:r>
+              <a:rPr sz="1400" b="0">
+                <a:solidFill>
+                  <a:srgbClr val="FFFFFF"/>
+                </a:solidFill>
+                <a:latin typeface="Consolas"/>
+              </a:rPr>
+              <a:t>0.10</a:t>
+            </a:r>
+          </a:p>
+        </p:txBody>
+      </p:sp>
+      <p:sp>
+        <p:nvSpPr>
+          <p:cNvPr id="33" name="TextBox 32"/>
+          <p:cNvSpPr txBox="1"/>
+          <p:nvPr/>
+        </p:nvSpPr>
+        <p:spPr>
+          <a:xfrm>
+            <a:off x="2194560" y="4434840"/>
+            <a:ext cx="2194560" cy="365760"/>
+          </a:xfrm>
+          <a:prstGeom prst="rect">
+            <a:avLst/>
+          </a:prstGeom>
+          <a:noFill/>
+        </p:spPr>
+        <p:txBody>
+          <a:bodyPr wrap="square" lIns="0" rIns="0" tIns="0" bIns="0" anchor="t">
+            <a:spAutoFit/>
+          </a:bodyPr>
+          <a:lstStyle/>
+          <a:p>
+            <a:pPr algn="ctr"/>
+            <a:r>
+              <a:rPr sz="1400" b="0">
+                <a:solidFill>
+                  <a:srgbClr val="FFFFFF"/>
+                </a:solidFill>
+                <a:latin typeface="Consolas"/>
+              </a:rPr>
+              <a:t>19.93</a:t>
+            </a:r>
+          </a:p>
+        </p:txBody>
+      </p:sp>
+      <p:sp>
+        <p:nvSpPr>
+          <p:cNvPr id="34" name="TextBox 33"/>
+          <p:cNvSpPr txBox="1"/>
+          <p:nvPr/>
+        </p:nvSpPr>
+        <p:spPr>
+          <a:xfrm>
+            <a:off x="4389120" y="4434840"/>
+            <a:ext cx="2194560" cy="365760"/>
+          </a:xfrm>
+          <a:prstGeom prst="rect">
+            <a:avLst/>
+          </a:prstGeom>
+          <a:noFill/>
+        </p:spPr>
+        <p:txBody>
+          <a:bodyPr wrap="square" lIns="0" rIns="0" tIns="0" bIns="0" anchor="t">
+            <a:spAutoFit/>
+          </a:bodyPr>
+          <a:lstStyle/>
+          <a:p>
+            <a:pPr algn="ctr"/>
+            <a:r>
+              <a:rPr sz="1400" b="0">
+                <a:solidFill>
+                  <a:srgbClr val="FFFFFF"/>
+                </a:solidFill>
+                <a:latin typeface="Consolas"/>
+              </a:rPr>
+              <a:t>28.80</a:t>
+            </a:r>
+          </a:p>
+        </p:txBody>
+      </p:sp>
+      <p:sp>
+        <p:nvSpPr>
+          <p:cNvPr id="35" name="Rectangle 34"/>
+          <p:cNvSpPr/>
+          <p:nvPr/>
+        </p:nvSpPr>
+        <p:spPr>
+          <a:xfrm>
+            <a:off x="640080" y="4846320"/>
+            <a:ext cx="5943600" cy="420624"/>
           </a:xfrm>
           <a:prstGeom prst="rect">
             <a:avLst/>
@@ -11883,13 +13084,13 @@
       </p:sp>
       <p:sp>
         <p:nvSpPr>
-          <p:cNvPr id="32" name="TextBox 31"/>
-          <p:cNvSpPr txBox="1"/>
-          <p:nvPr/>
-        </p:nvSpPr>
-        <p:spPr>
-          <a:xfrm>
-            <a:off x="822960" y="4681728"/>
+          <p:cNvPr id="36" name="TextBox 35"/>
+          <p:cNvSpPr txBox="1"/>
+          <p:nvPr/>
+        </p:nvSpPr>
+        <p:spPr>
+          <a:xfrm>
+            <a:off x="822960" y="4892040"/>
             <a:ext cx="1371600" cy="365760"/>
           </a:xfrm>
           <a:prstGeom prst="rect">
@@ -11911,20 +13112,20 @@
                 </a:solidFill>
                 <a:latin typeface="Consolas"/>
               </a:rPr>
-              <a:t>0.10</a:t>
-            </a:r>
-          </a:p>
-        </p:txBody>
-      </p:sp>
-      <p:sp>
-        <p:nvSpPr>
-          <p:cNvPr id="33" name="TextBox 32"/>
-          <p:cNvSpPr txBox="1"/>
-          <p:nvPr/>
-        </p:nvSpPr>
-        <p:spPr>
-          <a:xfrm>
-            <a:off x="2194560" y="4681728"/>
+              <a:t>0.15</a:t>
+            </a:r>
+          </a:p>
+        </p:txBody>
+      </p:sp>
+      <p:sp>
+        <p:nvSpPr>
+          <p:cNvPr id="37" name="TextBox 36"/>
+          <p:cNvSpPr txBox="1"/>
+          <p:nvPr/>
+        </p:nvSpPr>
+        <p:spPr>
+          <a:xfrm>
+            <a:off x="2194560" y="4892040"/>
             <a:ext cx="2194560" cy="365760"/>
           </a:xfrm>
           <a:prstGeom prst="rect">
@@ -11946,20 +13147,20 @@
                 </a:solidFill>
                 <a:latin typeface="Consolas"/>
               </a:rPr>
-              <a:t>19.93</a:t>
-            </a:r>
-          </a:p>
-        </p:txBody>
-      </p:sp>
-      <p:sp>
-        <p:nvSpPr>
-          <p:cNvPr id="34" name="TextBox 33"/>
-          <p:cNvSpPr txBox="1"/>
-          <p:nvPr/>
-        </p:nvSpPr>
-        <p:spPr>
-          <a:xfrm>
-            <a:off x="4389120" y="4681728"/>
+              <a:t>19.88</a:t>
+            </a:r>
+          </a:p>
+        </p:txBody>
+      </p:sp>
+      <p:sp>
+        <p:nvSpPr>
+          <p:cNvPr id="38" name="TextBox 37"/>
+          <p:cNvSpPr txBox="1"/>
+          <p:nvPr/>
+        </p:nvSpPr>
+        <p:spPr>
+          <a:xfrm>
+            <a:off x="4389120" y="4892040"/>
             <a:ext cx="2194560" cy="365760"/>
           </a:xfrm>
           <a:prstGeom prst="rect">
@@ -11981,14 +13182,163 @@
                 </a:solidFill>
                 <a:latin typeface="Consolas"/>
               </a:rPr>
-              <a:t>28.80</a:t>
-            </a:r>
-          </a:p>
-        </p:txBody>
-      </p:sp>
-      <p:sp>
-        <p:nvSpPr>
-          <p:cNvPr id="35" name="Rounded Rectangle 34"/>
+              <a:t>28.63</a:t>
+            </a:r>
+          </a:p>
+        </p:txBody>
+      </p:sp>
+      <p:sp>
+        <p:nvSpPr>
+          <p:cNvPr id="39" name="Rectangle 38"/>
+          <p:cNvSpPr/>
+          <p:nvPr/>
+        </p:nvSpPr>
+        <p:spPr>
+          <a:xfrm>
+            <a:off x="640080" y="5303520"/>
+            <a:ext cx="5943600" cy="420624"/>
+          </a:xfrm>
+          <a:prstGeom prst="rect">
+            <a:avLst/>
+          </a:prstGeom>
+          <a:solidFill>
+            <a:srgbClr val="4A6060"/>
+          </a:solidFill>
+          <a:ln>
+            <a:noFill/>
+          </a:ln>
+          <a:effectLst/>
+        </p:spPr>
+        <p:style>
+          <a:lnRef idx="1">
+            <a:schemeClr val="accent1"/>
+          </a:lnRef>
+          <a:fillRef idx="3">
+            <a:schemeClr val="accent1"/>
+          </a:fillRef>
+          <a:effectRef idx="2">
+            <a:schemeClr val="accent1"/>
+          </a:effectRef>
+          <a:fontRef idx="minor">
+            <a:schemeClr val="lt1"/>
+          </a:fontRef>
+        </p:style>
+        <p:txBody>
+          <a:bodyPr rtlCol="0" anchor="ctr" lIns="0" rIns="0" tIns="0" bIns="0"/>
+          <a:lstStyle/>
+          <a:p>
+            <a:pPr algn="ctr"/>
+          </a:p>
+        </p:txBody>
+      </p:sp>
+      <p:sp>
+        <p:nvSpPr>
+          <p:cNvPr id="40" name="TextBox 39"/>
+          <p:cNvSpPr txBox="1"/>
+          <p:nvPr/>
+        </p:nvSpPr>
+        <p:spPr>
+          <a:xfrm>
+            <a:off x="822960" y="5349240"/>
+            <a:ext cx="1371600" cy="365760"/>
+          </a:xfrm>
+          <a:prstGeom prst="rect">
+            <a:avLst/>
+          </a:prstGeom>
+          <a:noFill/>
+        </p:spPr>
+        <p:txBody>
+          <a:bodyPr wrap="square" lIns="0" rIns="0" tIns="0" bIns="0" anchor="t">
+            <a:spAutoFit/>
+          </a:bodyPr>
+          <a:lstStyle/>
+          <a:p>
+            <a:pPr algn="ctr"/>
+            <a:r>
+              <a:rPr sz="1400" b="1">
+                <a:solidFill>
+                  <a:srgbClr val="F5C86E"/>
+                </a:solidFill>
+                <a:latin typeface="Consolas"/>
+              </a:rPr>
+              <a:t>0.20</a:t>
+            </a:r>
+          </a:p>
+        </p:txBody>
+      </p:sp>
+      <p:sp>
+        <p:nvSpPr>
+          <p:cNvPr id="41" name="TextBox 40"/>
+          <p:cNvSpPr txBox="1"/>
+          <p:nvPr/>
+        </p:nvSpPr>
+        <p:spPr>
+          <a:xfrm>
+            <a:off x="2194560" y="5349240"/>
+            <a:ext cx="2194560" cy="365760"/>
+          </a:xfrm>
+          <a:prstGeom prst="rect">
+            <a:avLst/>
+          </a:prstGeom>
+          <a:noFill/>
+        </p:spPr>
+        <p:txBody>
+          <a:bodyPr wrap="square" lIns="0" rIns="0" tIns="0" bIns="0" anchor="t">
+            <a:spAutoFit/>
+          </a:bodyPr>
+          <a:lstStyle/>
+          <a:p>
+            <a:pPr algn="ctr"/>
+            <a:r>
+              <a:rPr sz="1400" b="1">
+                <a:solidFill>
+                  <a:srgbClr val="E8A87C"/>
+                </a:solidFill>
+                <a:latin typeface="Consolas"/>
+              </a:rPr>
+              <a:t>20.09</a:t>
+            </a:r>
+          </a:p>
+        </p:txBody>
+      </p:sp>
+      <p:sp>
+        <p:nvSpPr>
+          <p:cNvPr id="42" name="TextBox 41"/>
+          <p:cNvSpPr txBox="1"/>
+          <p:nvPr/>
+        </p:nvSpPr>
+        <p:spPr>
+          <a:xfrm>
+            <a:off x="4389120" y="5349240"/>
+            <a:ext cx="2194560" cy="365760"/>
+          </a:xfrm>
+          <a:prstGeom prst="rect">
+            <a:avLst/>
+          </a:prstGeom>
+          <a:noFill/>
+        </p:spPr>
+        <p:txBody>
+          <a:bodyPr wrap="square" lIns="0" rIns="0" tIns="0" bIns="0" anchor="t">
+            <a:spAutoFit/>
+          </a:bodyPr>
+          <a:lstStyle/>
+          <a:p>
+            <a:pPr algn="ctr"/>
+            <a:r>
+              <a:rPr sz="1400" b="1">
+                <a:solidFill>
+                  <a:srgbClr val="E8A87C"/>
+                </a:solidFill>
+                <a:latin typeface="Consolas"/>
+              </a:rPr>
+              <a:t>28.60</a:t>
+            </a:r>
+          </a:p>
+        </p:txBody>
+      </p:sp>
+      <p:sp>
+        <p:nvSpPr>
+          <p:cNvPr id="43" name="Rounded Rectangle 42"/>
           <p:cNvSpPr/>
           <p:nvPr/>
         </p:nvSpPr>
@@ -12034,7 +13384,7 @@
       </p:sp>
       <p:sp>
         <p:nvSpPr>
-          <p:cNvPr id="36" name="TextBox 35"/>
+          <p:cNvPr id="44" name="TextBox 43"/>
           <p:cNvSpPr txBox="1"/>
           <p:nvPr/>
         </p:nvSpPr>
@@ -12069,7 +13419,7 @@
       </p:sp>
       <p:sp>
         <p:nvSpPr>
-          <p:cNvPr id="37" name="TextBox 36"/>
+          <p:cNvPr id="45" name="TextBox 44"/>
           <p:cNvSpPr txBox="1"/>
           <p:nvPr/>
         </p:nvSpPr>
@@ -12104,7 +13454,7 @@
       </p:sp>
       <p:sp>
         <p:nvSpPr>
-          <p:cNvPr id="38" name="TextBox 37"/>
+          <p:cNvPr id="46" name="TextBox 45"/>
           <p:cNvSpPr txBox="1"/>
           <p:nvPr/>
         </p:nvSpPr>
@@ -12148,7 +13498,7 @@
       </p:sp>
       <p:sp>
         <p:nvSpPr>
-          <p:cNvPr id="39" name="TextBox 38"/>
+          <p:cNvPr id="47" name="TextBox 46"/>
           <p:cNvSpPr txBox="1"/>
           <p:nvPr/>
         </p:nvSpPr>
@@ -12183,7 +13533,7 @@
       </p:sp>
       <p:sp>
         <p:nvSpPr>
-          <p:cNvPr id="40" name="TextBox 39"/>
+          <p:cNvPr id="48" name="TextBox 47"/>
           <p:cNvSpPr txBox="1"/>
           <p:nvPr/>
         </p:nvSpPr>
@@ -12220,14 +13570,14 @@
                 </a:solidFill>
                 <a:latin typeface="Calibri"/>
               </a:rPr>
-              <a:t>actually hurts performance</a:t>
-            </a:r>
-          </a:p>
-        </p:txBody>
-      </p:sp>
-      <p:sp>
-        <p:nvSpPr>
-          <p:cNvPr id="41" name="TextBox 40"/>
+              <a:t>dips — a noisy bump</a:t>
+            </a:r>
+          </a:p>
+        </p:txBody>
+      </p:sp>
+      <p:sp>
+        <p:nvSpPr>
+          <p:cNvPr id="49" name="TextBox 48"/>
           <p:cNvSpPr txBox="1"/>
           <p:nvPr/>
         </p:nvSpPr>
@@ -12262,7 +13612,7 @@
       </p:sp>
       <p:sp>
         <p:nvSpPr>
-          <p:cNvPr id="42" name="TextBox 41"/>
+          <p:cNvPr id="50" name="TextBox 49"/>
           <p:cNvSpPr txBox="1"/>
           <p:nvPr/>
         </p:nvSpPr>
@@ -12290,7 +13640,7 @@
                 </a:solidFill>
                 <a:latin typeface="Calibri"/>
               </a:rPr>
-              <a:t>λ = 0.07 </a:t>
+              <a:t>λ = 0.10 </a:t>
             </a:r>
             <a:r>
               <a:rPr sz="1300" b="0" i="0">
@@ -12299,14 +13649,14 @@
                 </a:solidFill>
                 <a:latin typeface="Calibri"/>
               </a:rPr>
-              <a:t>recovers, but not best</a:t>
-            </a:r>
-          </a:p>
-        </p:txBody>
-      </p:sp>
-      <p:sp>
-        <p:nvSpPr>
-          <p:cNvPr id="43" name="TextBox 42"/>
+              <a:t>strong, but not the best</a:t>
+            </a:r>
+          </a:p>
+        </p:txBody>
+      </p:sp>
+      <p:sp>
+        <p:nvSpPr>
+          <p:cNvPr id="51" name="TextBox 50"/>
           <p:cNvSpPr txBox="1"/>
           <p:nvPr/>
         </p:nvSpPr>
@@ -12341,7 +13691,7 @@
       </p:sp>
       <p:sp>
         <p:nvSpPr>
-          <p:cNvPr id="44" name="TextBox 43"/>
+          <p:cNvPr id="52" name="TextBox 51"/>
           <p:cNvSpPr txBox="1"/>
           <p:nvPr/>
         </p:nvSpPr>
@@ -12369,7 +13719,7 @@
                 </a:solidFill>
                 <a:latin typeface="Calibri"/>
               </a:rPr>
-              <a:t>λ = 0.10 </a:t>
+              <a:t>λ = 0.15–0.20 </a:t>
             </a:r>
             <a:r>
               <a:rPr sz="1300" b="0" i="0">
@@ -12378,14 +13728,14 @@
                 </a:solidFill>
                 <a:latin typeface="Calibri"/>
               </a:rPr>
-              <a:t>achieves the lowest WER</a:t>
-            </a:r>
-          </a:p>
-        </p:txBody>
-      </p:sp>
-      <p:sp>
-        <p:nvSpPr>
-          <p:cNvPr id="45" name="TextBox 44"/>
+              <a:t>lowest WER (flat optimum)</a:t>
+            </a:r>
+          </a:p>
+        </p:txBody>
+      </p:sp>
+      <p:sp>
+        <p:nvSpPr>
+          <p:cNvPr id="53" name="TextBox 52"/>
           <p:cNvSpPr txBox="1"/>
           <p:nvPr/>
         </p:nvSpPr>
@@ -12420,7 +13770,7 @@
       </p:sp>
       <p:sp>
         <p:nvSpPr>
-          <p:cNvPr id="46" name="TextBox 45"/>
+          <p:cNvPr id="54" name="TextBox 53"/>
           <p:cNvSpPr txBox="1"/>
           <p:nvPr/>
         </p:nvSpPr>
@@ -12448,14 +13798,14 @@
                 </a:solidFill>
                 <a:latin typeface="Consolas"/>
               </a:rPr>
-              <a:t>λ = 0.10 → 19.93 / 28.80</a:t>
-            </a:r>
-          </a:p>
-        </p:txBody>
-      </p:sp>
-      <p:sp>
-        <p:nvSpPr>
-          <p:cNvPr id="47" name="TextBox 46"/>
+              <a:t>λ = 0.15 → 19.88 / 28.63</a:t>
+            </a:r>
+          </a:p>
+        </p:txBody>
+      </p:sp>
+      <p:sp>
+        <p:nvSpPr>
+          <p:cNvPr id="55" name="TextBox 54"/>
           <p:cNvSpPr txBox="1"/>
           <p:nvPr/>
         </p:nvSpPr>
@@ -12483,14 +13833,14 @@
                 </a:solidFill>
                 <a:latin typeface="Cambria"/>
               </a:rPr>
-              <a:t>Used as MaxEnt baseline in slide 7.</a:t>
-            </a:r>
-          </a:p>
-        </p:txBody>
-      </p:sp>
-      <p:sp>
-        <p:nvSpPr>
-          <p:cNvPr id="48" name="TextBox 47"/>
+              <a:t>Broad optimum → robust to λ choice.</a:t>
+            </a:r>
+          </a:p>
+        </p:txBody>
+      </p:sp>
+      <p:sp>
+        <p:nvSpPr>
+          <p:cNvPr id="56" name="TextBox 55"/>
           <p:cNvSpPr txBox="1"/>
           <p:nvPr/>
         </p:nvSpPr>
@@ -12525,7 +13875,7 @@
       </p:sp>
       <p:sp>
         <p:nvSpPr>
-          <p:cNvPr id="49" name="TextBox 48"/>
+          <p:cNvPr id="57" name="TextBox 56"/>
           <p:cNvSpPr txBox="1"/>
           <p:nvPr/>
         </p:nvSpPr>
@@ -12650,7 +14000,7 @@
                 </a:solidFill>
                 <a:latin typeface="Cambria"/>
               </a:rPr>
-              <a:t>Analysis</a:t>
+              <a:t>Results</a:t>
             </a:r>
           </a:p>
         </p:txBody>
@@ -12728,7 +14078,7 @@
                 </a:solidFill>
                 <a:latin typeface="Cambria"/>
               </a:rPr>
-              <a:t>Why Label Smoothing &gt; MaxEnt</a:t>
+              <a:t>Label Smoothing — α Sweep</a:t>
             </a:r>
           </a:p>
         </p:txBody>
@@ -12778,19 +14128,166 @@
       </p:sp>
       <p:sp>
         <p:nvSpPr>
-          <p:cNvPr id="7" name="Rounded Rectangle 6"/>
+          <p:cNvPr id="7" name="Rectangle 6"/>
           <p:cNvSpPr/>
           <p:nvPr/>
         </p:nvSpPr>
         <p:spPr>
           <a:xfrm>
-            <a:off x="457200" y="1463040"/>
-            <a:ext cx="11247120" cy="1463040"/>
-          </a:xfrm>
-          <a:prstGeom prst="roundRect">
-            <a:avLst>
-              <a:gd name="adj" fmla="val 8000"/>
-            </a:avLst>
+            <a:off x="640080" y="1554480"/>
+            <a:ext cx="5943600" cy="502920"/>
+          </a:xfrm>
+          <a:prstGeom prst="rect">
+            <a:avLst/>
+          </a:prstGeom>
+          <a:solidFill>
+            <a:srgbClr val="335566"/>
+          </a:solidFill>
+          <a:ln>
+            <a:noFill/>
+          </a:ln>
+          <a:effectLst/>
+        </p:spPr>
+        <p:style>
+          <a:lnRef idx="1">
+            <a:schemeClr val="accent1"/>
+          </a:lnRef>
+          <a:fillRef idx="3">
+            <a:schemeClr val="accent1"/>
+          </a:fillRef>
+          <a:effectRef idx="2">
+            <a:schemeClr val="accent1"/>
+          </a:effectRef>
+          <a:fontRef idx="minor">
+            <a:schemeClr val="lt1"/>
+          </a:fontRef>
+        </p:style>
+        <p:txBody>
+          <a:bodyPr rtlCol="0" anchor="ctr" lIns="0" rIns="0" tIns="0" bIns="0"/>
+          <a:lstStyle/>
+          <a:p>
+            <a:pPr algn="ctr"/>
+          </a:p>
+        </p:txBody>
+      </p:sp>
+      <p:sp>
+        <p:nvSpPr>
+          <p:cNvPr id="8" name="TextBox 7"/>
+          <p:cNvSpPr txBox="1"/>
+          <p:nvPr/>
+        </p:nvSpPr>
+        <p:spPr>
+          <a:xfrm>
+            <a:off x="822960" y="1627632"/>
+            <a:ext cx="1371600" cy="365760"/>
+          </a:xfrm>
+          <a:prstGeom prst="rect">
+            <a:avLst/>
+          </a:prstGeom>
+          <a:noFill/>
+        </p:spPr>
+        <p:txBody>
+          <a:bodyPr wrap="square" lIns="0" rIns="0" tIns="0" bIns="0" anchor="t">
+            <a:spAutoFit/>
+          </a:bodyPr>
+          <a:lstStyle/>
+          <a:p>
+            <a:pPr algn="ctr"/>
+            <a:r>
+              <a:rPr sz="1600" b="1">
+                <a:solidFill>
+                  <a:srgbClr val="FFFFFF"/>
+                </a:solidFill>
+                <a:latin typeface="Cambria"/>
+              </a:rPr>
+              <a:t>α</a:t>
+            </a:r>
+          </a:p>
+        </p:txBody>
+      </p:sp>
+      <p:sp>
+        <p:nvSpPr>
+          <p:cNvPr id="9" name="TextBox 8"/>
+          <p:cNvSpPr txBox="1"/>
+          <p:nvPr/>
+        </p:nvSpPr>
+        <p:spPr>
+          <a:xfrm>
+            <a:off x="2194560" y="1627632"/>
+            <a:ext cx="2194560" cy="365760"/>
+          </a:xfrm>
+          <a:prstGeom prst="rect">
+            <a:avLst/>
+          </a:prstGeom>
+          <a:noFill/>
+        </p:spPr>
+        <p:txBody>
+          <a:bodyPr wrap="square" lIns="0" rIns="0" tIns="0" bIns="0" anchor="t">
+            <a:spAutoFit/>
+          </a:bodyPr>
+          <a:lstStyle/>
+          <a:p>
+            <a:pPr algn="ctr"/>
+            <a:r>
+              <a:rPr sz="1600" b="1">
+                <a:solidFill>
+                  <a:srgbClr val="FFFFFF"/>
+                </a:solidFill>
+                <a:latin typeface="Cambria"/>
+              </a:rPr>
+              <a:t>test-clean</a:t>
+            </a:r>
+          </a:p>
+        </p:txBody>
+      </p:sp>
+      <p:sp>
+        <p:nvSpPr>
+          <p:cNvPr id="10" name="TextBox 9"/>
+          <p:cNvSpPr txBox="1"/>
+          <p:nvPr/>
+        </p:nvSpPr>
+        <p:spPr>
+          <a:xfrm>
+            <a:off x="4389120" y="1627632"/>
+            <a:ext cx="2194560" cy="365760"/>
+          </a:xfrm>
+          <a:prstGeom prst="rect">
+            <a:avLst/>
+          </a:prstGeom>
+          <a:noFill/>
+        </p:spPr>
+        <p:txBody>
+          <a:bodyPr wrap="square" lIns="0" rIns="0" tIns="0" bIns="0" anchor="t">
+            <a:spAutoFit/>
+          </a:bodyPr>
+          <a:lstStyle/>
+          <a:p>
+            <a:pPr algn="ctr"/>
+            <a:r>
+              <a:rPr sz="1600" b="1">
+                <a:solidFill>
+                  <a:srgbClr val="FFFFFF"/>
+                </a:solidFill>
+                <a:latin typeface="Cambria"/>
+              </a:rPr>
+              <a:t>test-other</a:t>
+            </a:r>
+          </a:p>
+        </p:txBody>
+      </p:sp>
+      <p:sp>
+        <p:nvSpPr>
+          <p:cNvPr id="11" name="Rectangle 10"/>
+          <p:cNvSpPr/>
+          <p:nvPr/>
+        </p:nvSpPr>
+        <p:spPr>
+          <a:xfrm>
+            <a:off x="640080" y="2103120"/>
+            <a:ext cx="5943600" cy="420624"/>
+          </a:xfrm>
+          <a:prstGeom prst="rect">
+            <a:avLst/>
           </a:prstGeom>
           <a:solidFill>
             <a:srgbClr val="555555"/>
@@ -12824,233 +14321,125 @@
       </p:sp>
       <p:sp>
         <p:nvSpPr>
-          <p:cNvPr id="8" name="TextBox 7"/>
-          <p:cNvSpPr txBox="1"/>
-          <p:nvPr/>
-        </p:nvSpPr>
-        <p:spPr>
-          <a:xfrm>
-            <a:off x="640080" y="1600200"/>
-            <a:ext cx="10972800" cy="365760"/>
-          </a:xfrm>
-          <a:prstGeom prst="rect">
-            <a:avLst/>
-          </a:prstGeom>
-          <a:noFill/>
-        </p:spPr>
-        <p:txBody>
-          <a:bodyPr wrap="square" lIns="0" rIns="0" tIns="0" bIns="0" anchor="t">
-            <a:spAutoFit/>
-          </a:bodyPr>
-          <a:lstStyle/>
-          <a:p>
-            <a:pPr algn="l"/>
-            <a:r>
-              <a:rPr sz="1600" b="1">
-                <a:solidFill>
-                  <a:srgbClr val="5BB5BE"/>
-                </a:solidFill>
-                <a:latin typeface="Cambria"/>
-              </a:rPr>
-              <a:t>Same family, different weighting:</a:t>
-            </a:r>
-          </a:p>
-        </p:txBody>
-      </p:sp>
-      <p:sp>
-        <p:nvSpPr>
-          <p:cNvPr id="9" name="TextBox 8"/>
-          <p:cNvSpPr txBox="1"/>
-          <p:nvPr/>
-        </p:nvSpPr>
-        <p:spPr>
-          <a:xfrm>
-            <a:off x="822960" y="2011680"/>
-            <a:ext cx="274320" cy="365760"/>
-          </a:xfrm>
-          <a:prstGeom prst="rect">
-            <a:avLst/>
-          </a:prstGeom>
-          <a:noFill/>
-        </p:spPr>
-        <p:txBody>
-          <a:bodyPr wrap="square" lIns="0" rIns="0" tIns="0" bIns="0" anchor="t">
-            <a:spAutoFit/>
-          </a:bodyPr>
-          <a:lstStyle/>
-          <a:p>
-            <a:pPr algn="l"/>
+          <p:cNvPr id="12" name="TextBox 11"/>
+          <p:cNvSpPr txBox="1"/>
+          <p:nvPr/>
+        </p:nvSpPr>
+        <p:spPr>
+          <a:xfrm>
+            <a:off x="822960" y="2148840"/>
+            <a:ext cx="1371600" cy="365760"/>
+          </a:xfrm>
+          <a:prstGeom prst="rect">
+            <a:avLst/>
+          </a:prstGeom>
+          <a:noFill/>
+        </p:spPr>
+        <p:txBody>
+          <a:bodyPr wrap="square" lIns="0" rIns="0" tIns="0" bIns="0" anchor="t">
+            <a:spAutoFit/>
+          </a:bodyPr>
+          <a:lstStyle/>
+          <a:p>
+            <a:pPr algn="ctr"/>
             <a:r>
               <a:rPr sz="1400" b="0">
                 <a:solidFill>
-                  <a:srgbClr val="E8A87C"/>
-                </a:solidFill>
-                <a:latin typeface="Calibri"/>
-              </a:rPr>
-              <a:t>●</a:t>
-            </a:r>
-          </a:p>
-        </p:txBody>
-      </p:sp>
-      <p:sp>
-        <p:nvSpPr>
-          <p:cNvPr id="10" name="TextBox 9"/>
-          <p:cNvSpPr txBox="1"/>
-          <p:nvPr/>
-        </p:nvSpPr>
-        <p:spPr>
-          <a:xfrm>
-            <a:off x="1051560" y="2011680"/>
-            <a:ext cx="10515600" cy="365760"/>
-          </a:xfrm>
-          <a:prstGeom prst="rect">
-            <a:avLst/>
-          </a:prstGeom>
-          <a:noFill/>
-        </p:spPr>
-        <p:txBody>
-          <a:bodyPr wrap="square" lIns="0" rIns="0" tIns="0" bIns="0" anchor="t">
-            <a:spAutoFit/>
-          </a:bodyPr>
-          <a:lstStyle/>
-          <a:p>
-            <a:pPr algn="l"/>
-            <a:r>
-              <a:rPr sz="1400" b="1" i="0">
-                <a:solidFill>
-                  <a:srgbClr val="E8A87C"/>
-                </a:solidFill>
-                <a:latin typeface="Calibri"/>
-              </a:rPr>
-              <a:t>MaxEnt: </a:t>
-            </a:r>
-            <a:r>
-              <a:rPr sz="1400" b="0" i="0">
-                <a:solidFill>
                   <a:srgbClr val="FFFFFF"/>
                 </a:solidFill>
                 <a:latin typeface="Consolas"/>
               </a:rPr>
-              <a:t>H(p) = −Σ pᵥ log pᵥ</a:t>
-            </a:r>
-            <a:r>
-              <a:rPr sz="1400" b="0" i="0">
+              <a:t>0.00 (baseline)</a:t>
+            </a:r>
+          </a:p>
+        </p:txBody>
+      </p:sp>
+      <p:sp>
+        <p:nvSpPr>
+          <p:cNvPr id="13" name="TextBox 12"/>
+          <p:cNvSpPr txBox="1"/>
+          <p:nvPr/>
+        </p:nvSpPr>
+        <p:spPr>
+          <a:xfrm>
+            <a:off x="2194560" y="2148840"/>
+            <a:ext cx="2194560" cy="365760"/>
+          </a:xfrm>
+          <a:prstGeom prst="rect">
+            <a:avLst/>
+          </a:prstGeom>
+          <a:noFill/>
+        </p:spPr>
+        <p:txBody>
+          <a:bodyPr wrap="square" lIns="0" rIns="0" tIns="0" bIns="0" anchor="t">
+            <a:spAutoFit/>
+          </a:bodyPr>
+          <a:lstStyle/>
+          <a:p>
+            <a:pPr algn="ctr"/>
+            <a:r>
+              <a:rPr sz="1400" b="0">
                 <a:solidFill>
                   <a:srgbClr val="FFFFFF"/>
                 </a:solidFill>
-                <a:latin typeface="Calibri"/>
-              </a:rPr>
-              <a:t>   →  weights by pᵥ — already-confident tokens get pushed first</a:t>
-            </a:r>
-          </a:p>
-        </p:txBody>
-      </p:sp>
-      <p:sp>
-        <p:nvSpPr>
-          <p:cNvPr id="11" name="TextBox 10"/>
-          <p:cNvSpPr txBox="1"/>
-          <p:nvPr/>
-        </p:nvSpPr>
-        <p:spPr>
-          <a:xfrm>
-            <a:off x="822960" y="2423160"/>
-            <a:ext cx="274320" cy="365760"/>
-          </a:xfrm>
-          <a:prstGeom prst="rect">
-            <a:avLst/>
-          </a:prstGeom>
-          <a:noFill/>
-        </p:spPr>
-        <p:txBody>
-          <a:bodyPr wrap="square" lIns="0" rIns="0" tIns="0" bIns="0" anchor="t">
-            <a:spAutoFit/>
-          </a:bodyPr>
-          <a:lstStyle/>
-          <a:p>
-            <a:pPr algn="l"/>
+                <a:latin typeface="Consolas"/>
+              </a:rPr>
+              <a:t>21.16</a:t>
+            </a:r>
+          </a:p>
+        </p:txBody>
+      </p:sp>
+      <p:sp>
+        <p:nvSpPr>
+          <p:cNvPr id="14" name="TextBox 13"/>
+          <p:cNvSpPr txBox="1"/>
+          <p:nvPr/>
+        </p:nvSpPr>
+        <p:spPr>
+          <a:xfrm>
+            <a:off x="4389120" y="2148840"/>
+            <a:ext cx="2194560" cy="365760"/>
+          </a:xfrm>
+          <a:prstGeom prst="rect">
+            <a:avLst/>
+          </a:prstGeom>
+          <a:noFill/>
+        </p:spPr>
+        <p:txBody>
+          <a:bodyPr wrap="square" lIns="0" rIns="0" tIns="0" bIns="0" anchor="t">
+            <a:spAutoFit/>
+          </a:bodyPr>
+          <a:lstStyle/>
+          <a:p>
+            <a:pPr algn="ctr"/>
             <a:r>
               <a:rPr sz="1400" b="0">
                 <a:solidFill>
-                  <a:srgbClr val="E96379"/>
-                </a:solidFill>
-                <a:latin typeface="Calibri"/>
-              </a:rPr>
-              <a:t>●</a:t>
-            </a:r>
-          </a:p>
-        </p:txBody>
-      </p:sp>
-      <p:sp>
-        <p:nvSpPr>
-          <p:cNvPr id="12" name="TextBox 11"/>
-          <p:cNvSpPr txBox="1"/>
-          <p:nvPr/>
-        </p:nvSpPr>
-        <p:spPr>
-          <a:xfrm>
-            <a:off x="1051560" y="2423160"/>
-            <a:ext cx="10515600" cy="365760"/>
-          </a:xfrm>
-          <a:prstGeom prst="rect">
-            <a:avLst/>
-          </a:prstGeom>
-          <a:noFill/>
-        </p:spPr>
-        <p:txBody>
-          <a:bodyPr wrap="square" lIns="0" rIns="0" tIns="0" bIns="0" anchor="t">
-            <a:spAutoFit/>
-          </a:bodyPr>
-          <a:lstStyle/>
-          <a:p>
-            <a:pPr algn="l"/>
-            <a:r>
-              <a:rPr sz="1400" b="1" i="0">
-                <a:solidFill>
-                  <a:srgbClr val="E96379"/>
-                </a:solidFill>
-                <a:latin typeface="Calibri"/>
-              </a:rPr>
-              <a:t>LS:     </a:t>
-            </a:r>
-            <a:r>
-              <a:rPr sz="1400" b="0" i="0">
-                <a:solidFill>
                   <a:srgbClr val="FFFFFF"/>
                 </a:solidFill>
                 <a:latin typeface="Consolas"/>
               </a:rPr>
-              <a:t>LS(p) = −(1/V) Σ log pᵥ</a:t>
-            </a:r>
-            <a:r>
-              <a:rPr sz="1400" b="0" i="0">
-                <a:solidFill>
-                  <a:srgbClr val="FFFFFF"/>
-                </a:solidFill>
-                <a:latin typeface="Calibri"/>
-              </a:rPr>
-              <a:t>   →  uniform weight across vocab — all tokens regularized equally</a:t>
-            </a:r>
-          </a:p>
-        </p:txBody>
-      </p:sp>
-      <p:sp>
-        <p:nvSpPr>
-          <p:cNvPr id="13" name="Rounded Rectangle 12"/>
+              <a:t>30.17</a:t>
+            </a:r>
+          </a:p>
+        </p:txBody>
+      </p:sp>
+      <p:sp>
+        <p:nvSpPr>
+          <p:cNvPr id="15" name="Rectangle 14"/>
           <p:cNvSpPr/>
           <p:nvPr/>
         </p:nvSpPr>
         <p:spPr>
           <a:xfrm>
-            <a:off x="457200" y="3108960"/>
-            <a:ext cx="11247120" cy="2743200"/>
-          </a:xfrm>
-          <a:prstGeom prst="roundRect">
-            <a:avLst>
-              <a:gd name="adj" fmla="val 8000"/>
-            </a:avLst>
+            <a:off x="640080" y="2560320"/>
+            <a:ext cx="5943600" cy="420624"/>
+          </a:xfrm>
+          <a:prstGeom prst="rect">
+            <a:avLst/>
           </a:prstGeom>
           <a:solidFill>
-            <a:srgbClr val="4E4E4E"/>
+            <a:srgbClr val="555555"/>
           </a:solidFill>
           <a:ln>
             <a:noFill/>
@@ -13081,14 +14470,1059 @@
       </p:sp>
       <p:sp>
         <p:nvSpPr>
-          <p:cNvPr id="14" name="TextBox 13"/>
-          <p:cNvSpPr txBox="1"/>
-          <p:nvPr/>
-        </p:nvSpPr>
-        <p:spPr>
-          <a:xfrm>
-            <a:off x="640080" y="3246120"/>
-            <a:ext cx="10972800" cy="365760"/>
+          <p:cNvPr id="16" name="TextBox 15"/>
+          <p:cNvSpPr txBox="1"/>
+          <p:nvPr/>
+        </p:nvSpPr>
+        <p:spPr>
+          <a:xfrm>
+            <a:off x="822960" y="2606040"/>
+            <a:ext cx="1371600" cy="365760"/>
+          </a:xfrm>
+          <a:prstGeom prst="rect">
+            <a:avLst/>
+          </a:prstGeom>
+          <a:noFill/>
+        </p:spPr>
+        <p:txBody>
+          <a:bodyPr wrap="square" lIns="0" rIns="0" tIns="0" bIns="0" anchor="t">
+            <a:spAutoFit/>
+          </a:bodyPr>
+          <a:lstStyle/>
+          <a:p>
+            <a:pPr algn="ctr"/>
+            <a:r>
+              <a:rPr sz="1400" b="0">
+                <a:solidFill>
+                  <a:srgbClr val="FFFFFF"/>
+                </a:solidFill>
+                <a:latin typeface="Consolas"/>
+              </a:rPr>
+              <a:t>0.01</a:t>
+            </a:r>
+          </a:p>
+        </p:txBody>
+      </p:sp>
+      <p:sp>
+        <p:nvSpPr>
+          <p:cNvPr id="17" name="TextBox 16"/>
+          <p:cNvSpPr txBox="1"/>
+          <p:nvPr/>
+        </p:nvSpPr>
+        <p:spPr>
+          <a:xfrm>
+            <a:off x="2194560" y="2606040"/>
+            <a:ext cx="2194560" cy="365760"/>
+          </a:xfrm>
+          <a:prstGeom prst="rect">
+            <a:avLst/>
+          </a:prstGeom>
+          <a:noFill/>
+        </p:spPr>
+        <p:txBody>
+          <a:bodyPr wrap="square" lIns="0" rIns="0" tIns="0" bIns="0" anchor="t">
+            <a:spAutoFit/>
+          </a:bodyPr>
+          <a:lstStyle/>
+          <a:p>
+            <a:pPr algn="ctr"/>
+            <a:r>
+              <a:rPr sz="1400" b="0">
+                <a:solidFill>
+                  <a:srgbClr val="FFFFFF"/>
+                </a:solidFill>
+                <a:latin typeface="Consolas"/>
+              </a:rPr>
+              <a:t>20.90</a:t>
+            </a:r>
+          </a:p>
+        </p:txBody>
+      </p:sp>
+      <p:sp>
+        <p:nvSpPr>
+          <p:cNvPr id="18" name="TextBox 17"/>
+          <p:cNvSpPr txBox="1"/>
+          <p:nvPr/>
+        </p:nvSpPr>
+        <p:spPr>
+          <a:xfrm>
+            <a:off x="4389120" y="2606040"/>
+            <a:ext cx="2194560" cy="365760"/>
+          </a:xfrm>
+          <a:prstGeom prst="rect">
+            <a:avLst/>
+          </a:prstGeom>
+          <a:noFill/>
+        </p:spPr>
+        <p:txBody>
+          <a:bodyPr wrap="square" lIns="0" rIns="0" tIns="0" bIns="0" anchor="t">
+            <a:spAutoFit/>
+          </a:bodyPr>
+          <a:lstStyle/>
+          <a:p>
+            <a:pPr algn="ctr"/>
+            <a:r>
+              <a:rPr sz="1400" b="0">
+                <a:solidFill>
+                  <a:srgbClr val="FFFFFF"/>
+                </a:solidFill>
+                <a:latin typeface="Consolas"/>
+              </a:rPr>
+              <a:t>30.15</a:t>
+            </a:r>
+          </a:p>
+        </p:txBody>
+      </p:sp>
+      <p:sp>
+        <p:nvSpPr>
+          <p:cNvPr id="19" name="Rectangle 18"/>
+          <p:cNvSpPr/>
+          <p:nvPr/>
+        </p:nvSpPr>
+        <p:spPr>
+          <a:xfrm>
+            <a:off x="640080" y="3017520"/>
+            <a:ext cx="5943600" cy="420624"/>
+          </a:xfrm>
+          <a:prstGeom prst="rect">
+            <a:avLst/>
+          </a:prstGeom>
+          <a:solidFill>
+            <a:srgbClr val="555555"/>
+          </a:solidFill>
+          <a:ln>
+            <a:noFill/>
+          </a:ln>
+          <a:effectLst/>
+        </p:spPr>
+        <p:style>
+          <a:lnRef idx="1">
+            <a:schemeClr val="accent1"/>
+          </a:lnRef>
+          <a:fillRef idx="3">
+            <a:schemeClr val="accent1"/>
+          </a:fillRef>
+          <a:effectRef idx="2">
+            <a:schemeClr val="accent1"/>
+          </a:effectRef>
+          <a:fontRef idx="minor">
+            <a:schemeClr val="lt1"/>
+          </a:fontRef>
+        </p:style>
+        <p:txBody>
+          <a:bodyPr rtlCol="0" anchor="ctr" lIns="0" rIns="0" tIns="0" bIns="0"/>
+          <a:lstStyle/>
+          <a:p>
+            <a:pPr algn="ctr"/>
+          </a:p>
+        </p:txBody>
+      </p:sp>
+      <p:sp>
+        <p:nvSpPr>
+          <p:cNvPr id="20" name="TextBox 19"/>
+          <p:cNvSpPr txBox="1"/>
+          <p:nvPr/>
+        </p:nvSpPr>
+        <p:spPr>
+          <a:xfrm>
+            <a:off x="822960" y="3063240"/>
+            <a:ext cx="1371600" cy="365760"/>
+          </a:xfrm>
+          <a:prstGeom prst="rect">
+            <a:avLst/>
+          </a:prstGeom>
+          <a:noFill/>
+        </p:spPr>
+        <p:txBody>
+          <a:bodyPr wrap="square" lIns="0" rIns="0" tIns="0" bIns="0" anchor="t">
+            <a:spAutoFit/>
+          </a:bodyPr>
+          <a:lstStyle/>
+          <a:p>
+            <a:pPr algn="ctr"/>
+            <a:r>
+              <a:rPr sz="1400" b="0">
+                <a:solidFill>
+                  <a:srgbClr val="FFFFFF"/>
+                </a:solidFill>
+                <a:latin typeface="Consolas"/>
+              </a:rPr>
+              <a:t>0.03</a:t>
+            </a:r>
+          </a:p>
+        </p:txBody>
+      </p:sp>
+      <p:sp>
+        <p:nvSpPr>
+          <p:cNvPr id="21" name="TextBox 20"/>
+          <p:cNvSpPr txBox="1"/>
+          <p:nvPr/>
+        </p:nvSpPr>
+        <p:spPr>
+          <a:xfrm>
+            <a:off x="2194560" y="3063240"/>
+            <a:ext cx="2194560" cy="365760"/>
+          </a:xfrm>
+          <a:prstGeom prst="rect">
+            <a:avLst/>
+          </a:prstGeom>
+          <a:noFill/>
+        </p:spPr>
+        <p:txBody>
+          <a:bodyPr wrap="square" lIns="0" rIns="0" tIns="0" bIns="0" anchor="t">
+            <a:spAutoFit/>
+          </a:bodyPr>
+          <a:lstStyle/>
+          <a:p>
+            <a:pPr algn="ctr"/>
+            <a:r>
+              <a:rPr sz="1400" b="0">
+                <a:solidFill>
+                  <a:srgbClr val="FFFFFF"/>
+                </a:solidFill>
+                <a:latin typeface="Consolas"/>
+              </a:rPr>
+              <a:t>20.71</a:t>
+            </a:r>
+          </a:p>
+        </p:txBody>
+      </p:sp>
+      <p:sp>
+        <p:nvSpPr>
+          <p:cNvPr id="22" name="TextBox 21"/>
+          <p:cNvSpPr txBox="1"/>
+          <p:nvPr/>
+        </p:nvSpPr>
+        <p:spPr>
+          <a:xfrm>
+            <a:off x="4389120" y="3063240"/>
+            <a:ext cx="2194560" cy="365760"/>
+          </a:xfrm>
+          <a:prstGeom prst="rect">
+            <a:avLst/>
+          </a:prstGeom>
+          <a:noFill/>
+        </p:spPr>
+        <p:txBody>
+          <a:bodyPr wrap="square" lIns="0" rIns="0" tIns="0" bIns="0" anchor="t">
+            <a:spAutoFit/>
+          </a:bodyPr>
+          <a:lstStyle/>
+          <a:p>
+            <a:pPr algn="ctr"/>
+            <a:r>
+              <a:rPr sz="1400" b="0">
+                <a:solidFill>
+                  <a:srgbClr val="FFFFFF"/>
+                </a:solidFill>
+                <a:latin typeface="Consolas"/>
+              </a:rPr>
+              <a:t>29.98</a:t>
+            </a:r>
+          </a:p>
+        </p:txBody>
+      </p:sp>
+      <p:sp>
+        <p:nvSpPr>
+          <p:cNvPr id="23" name="Rectangle 22"/>
+          <p:cNvSpPr/>
+          <p:nvPr/>
+        </p:nvSpPr>
+        <p:spPr>
+          <a:xfrm>
+            <a:off x="640080" y="3474720"/>
+            <a:ext cx="5943600" cy="420624"/>
+          </a:xfrm>
+          <a:prstGeom prst="rect">
+            <a:avLst/>
+          </a:prstGeom>
+          <a:solidFill>
+            <a:srgbClr val="555555"/>
+          </a:solidFill>
+          <a:ln>
+            <a:noFill/>
+          </a:ln>
+          <a:effectLst/>
+        </p:spPr>
+        <p:style>
+          <a:lnRef idx="1">
+            <a:schemeClr val="accent1"/>
+          </a:lnRef>
+          <a:fillRef idx="3">
+            <a:schemeClr val="accent1"/>
+          </a:fillRef>
+          <a:effectRef idx="2">
+            <a:schemeClr val="accent1"/>
+          </a:effectRef>
+          <a:fontRef idx="minor">
+            <a:schemeClr val="lt1"/>
+          </a:fontRef>
+        </p:style>
+        <p:txBody>
+          <a:bodyPr rtlCol="0" anchor="ctr" lIns="0" rIns="0" tIns="0" bIns="0"/>
+          <a:lstStyle/>
+          <a:p>
+            <a:pPr algn="ctr"/>
+          </a:p>
+        </p:txBody>
+      </p:sp>
+      <p:sp>
+        <p:nvSpPr>
+          <p:cNvPr id="24" name="TextBox 23"/>
+          <p:cNvSpPr txBox="1"/>
+          <p:nvPr/>
+        </p:nvSpPr>
+        <p:spPr>
+          <a:xfrm>
+            <a:off x="822960" y="3520440"/>
+            <a:ext cx="1371600" cy="365760"/>
+          </a:xfrm>
+          <a:prstGeom prst="rect">
+            <a:avLst/>
+          </a:prstGeom>
+          <a:noFill/>
+        </p:spPr>
+        <p:txBody>
+          <a:bodyPr wrap="square" lIns="0" rIns="0" tIns="0" bIns="0" anchor="t">
+            <a:spAutoFit/>
+          </a:bodyPr>
+          <a:lstStyle/>
+          <a:p>
+            <a:pPr algn="ctr"/>
+            <a:r>
+              <a:rPr sz="1400" b="0">
+                <a:solidFill>
+                  <a:srgbClr val="FFFFFF"/>
+                </a:solidFill>
+                <a:latin typeface="Consolas"/>
+              </a:rPr>
+              <a:t>0.05</a:t>
+            </a:r>
+          </a:p>
+        </p:txBody>
+      </p:sp>
+      <p:sp>
+        <p:nvSpPr>
+          <p:cNvPr id="25" name="TextBox 24"/>
+          <p:cNvSpPr txBox="1"/>
+          <p:nvPr/>
+        </p:nvSpPr>
+        <p:spPr>
+          <a:xfrm>
+            <a:off x="2194560" y="3520440"/>
+            <a:ext cx="2194560" cy="365760"/>
+          </a:xfrm>
+          <a:prstGeom prst="rect">
+            <a:avLst/>
+          </a:prstGeom>
+          <a:noFill/>
+        </p:spPr>
+        <p:txBody>
+          <a:bodyPr wrap="square" lIns="0" rIns="0" tIns="0" bIns="0" anchor="t">
+            <a:spAutoFit/>
+          </a:bodyPr>
+          <a:lstStyle/>
+          <a:p>
+            <a:pPr algn="ctr"/>
+            <a:r>
+              <a:rPr sz="1400" b="0">
+                <a:solidFill>
+                  <a:srgbClr val="FFFFFF"/>
+                </a:solidFill>
+                <a:latin typeface="Consolas"/>
+              </a:rPr>
+              <a:t>21.43</a:t>
+            </a:r>
+          </a:p>
+        </p:txBody>
+      </p:sp>
+      <p:sp>
+        <p:nvSpPr>
+          <p:cNvPr id="26" name="TextBox 25"/>
+          <p:cNvSpPr txBox="1"/>
+          <p:nvPr/>
+        </p:nvSpPr>
+        <p:spPr>
+          <a:xfrm>
+            <a:off x="4389120" y="3520440"/>
+            <a:ext cx="2194560" cy="365760"/>
+          </a:xfrm>
+          <a:prstGeom prst="rect">
+            <a:avLst/>
+          </a:prstGeom>
+          <a:noFill/>
+        </p:spPr>
+        <p:txBody>
+          <a:bodyPr wrap="square" lIns="0" rIns="0" tIns="0" bIns="0" anchor="t">
+            <a:spAutoFit/>
+          </a:bodyPr>
+          <a:lstStyle/>
+          <a:p>
+            <a:pPr algn="ctr"/>
+            <a:r>
+              <a:rPr sz="1400" b="0">
+                <a:solidFill>
+                  <a:srgbClr val="FFFFFF"/>
+                </a:solidFill>
+                <a:latin typeface="Consolas"/>
+              </a:rPr>
+              <a:t>30.09</a:t>
+            </a:r>
+          </a:p>
+        </p:txBody>
+      </p:sp>
+      <p:sp>
+        <p:nvSpPr>
+          <p:cNvPr id="27" name="Rectangle 26"/>
+          <p:cNvSpPr/>
+          <p:nvPr/>
+        </p:nvSpPr>
+        <p:spPr>
+          <a:xfrm>
+            <a:off x="640080" y="3931920"/>
+            <a:ext cx="5943600" cy="420624"/>
+          </a:xfrm>
+          <a:prstGeom prst="rect">
+            <a:avLst/>
+          </a:prstGeom>
+          <a:solidFill>
+            <a:srgbClr val="555555"/>
+          </a:solidFill>
+          <a:ln>
+            <a:noFill/>
+          </a:ln>
+          <a:effectLst/>
+        </p:spPr>
+        <p:style>
+          <a:lnRef idx="1">
+            <a:schemeClr val="accent1"/>
+          </a:lnRef>
+          <a:fillRef idx="3">
+            <a:schemeClr val="accent1"/>
+          </a:fillRef>
+          <a:effectRef idx="2">
+            <a:schemeClr val="accent1"/>
+          </a:effectRef>
+          <a:fontRef idx="minor">
+            <a:schemeClr val="lt1"/>
+          </a:fontRef>
+        </p:style>
+        <p:txBody>
+          <a:bodyPr rtlCol="0" anchor="ctr" lIns="0" rIns="0" tIns="0" bIns="0"/>
+          <a:lstStyle/>
+          <a:p>
+            <a:pPr algn="ctr"/>
+          </a:p>
+        </p:txBody>
+      </p:sp>
+      <p:sp>
+        <p:nvSpPr>
+          <p:cNvPr id="28" name="TextBox 27"/>
+          <p:cNvSpPr txBox="1"/>
+          <p:nvPr/>
+        </p:nvSpPr>
+        <p:spPr>
+          <a:xfrm>
+            <a:off x="822960" y="3977640"/>
+            <a:ext cx="1371600" cy="365760"/>
+          </a:xfrm>
+          <a:prstGeom prst="rect">
+            <a:avLst/>
+          </a:prstGeom>
+          <a:noFill/>
+        </p:spPr>
+        <p:txBody>
+          <a:bodyPr wrap="square" lIns="0" rIns="0" tIns="0" bIns="0" anchor="t">
+            <a:spAutoFit/>
+          </a:bodyPr>
+          <a:lstStyle/>
+          <a:p>
+            <a:pPr algn="ctr"/>
+            <a:r>
+              <a:rPr sz="1400" b="0">
+                <a:solidFill>
+                  <a:srgbClr val="FFFFFF"/>
+                </a:solidFill>
+                <a:latin typeface="Consolas"/>
+              </a:rPr>
+              <a:t>0.07</a:t>
+            </a:r>
+          </a:p>
+        </p:txBody>
+      </p:sp>
+      <p:sp>
+        <p:nvSpPr>
+          <p:cNvPr id="29" name="TextBox 28"/>
+          <p:cNvSpPr txBox="1"/>
+          <p:nvPr/>
+        </p:nvSpPr>
+        <p:spPr>
+          <a:xfrm>
+            <a:off x="2194560" y="3977640"/>
+            <a:ext cx="2194560" cy="365760"/>
+          </a:xfrm>
+          <a:prstGeom prst="rect">
+            <a:avLst/>
+          </a:prstGeom>
+          <a:noFill/>
+        </p:spPr>
+        <p:txBody>
+          <a:bodyPr wrap="square" lIns="0" rIns="0" tIns="0" bIns="0" anchor="t">
+            <a:spAutoFit/>
+          </a:bodyPr>
+          <a:lstStyle/>
+          <a:p>
+            <a:pPr algn="ctr"/>
+            <a:r>
+              <a:rPr sz="1400" b="0">
+                <a:solidFill>
+                  <a:srgbClr val="FFFFFF"/>
+                </a:solidFill>
+                <a:latin typeface="Consolas"/>
+              </a:rPr>
+              <a:t>20.91</a:t>
+            </a:r>
+          </a:p>
+        </p:txBody>
+      </p:sp>
+      <p:sp>
+        <p:nvSpPr>
+          <p:cNvPr id="30" name="TextBox 29"/>
+          <p:cNvSpPr txBox="1"/>
+          <p:nvPr/>
+        </p:nvSpPr>
+        <p:spPr>
+          <a:xfrm>
+            <a:off x="4389120" y="3977640"/>
+            <a:ext cx="2194560" cy="365760"/>
+          </a:xfrm>
+          <a:prstGeom prst="rect">
+            <a:avLst/>
+          </a:prstGeom>
+          <a:noFill/>
+        </p:spPr>
+        <p:txBody>
+          <a:bodyPr wrap="square" lIns="0" rIns="0" tIns="0" bIns="0" anchor="t">
+            <a:spAutoFit/>
+          </a:bodyPr>
+          <a:lstStyle/>
+          <a:p>
+            <a:pPr algn="ctr"/>
+            <a:r>
+              <a:rPr sz="1400" b="0">
+                <a:solidFill>
+                  <a:srgbClr val="FFFFFF"/>
+                </a:solidFill>
+                <a:latin typeface="Consolas"/>
+              </a:rPr>
+              <a:t>29.75</a:t>
+            </a:r>
+          </a:p>
+        </p:txBody>
+      </p:sp>
+      <p:sp>
+        <p:nvSpPr>
+          <p:cNvPr id="31" name="Rectangle 30"/>
+          <p:cNvSpPr/>
+          <p:nvPr/>
+        </p:nvSpPr>
+        <p:spPr>
+          <a:xfrm>
+            <a:off x="640080" y="4389120"/>
+            <a:ext cx="5943600" cy="420624"/>
+          </a:xfrm>
+          <a:prstGeom prst="rect">
+            <a:avLst/>
+          </a:prstGeom>
+          <a:solidFill>
+            <a:srgbClr val="4A6060"/>
+          </a:solidFill>
+          <a:ln>
+            <a:noFill/>
+          </a:ln>
+          <a:effectLst/>
+        </p:spPr>
+        <p:style>
+          <a:lnRef idx="1">
+            <a:schemeClr val="accent1"/>
+          </a:lnRef>
+          <a:fillRef idx="3">
+            <a:schemeClr val="accent1"/>
+          </a:fillRef>
+          <a:effectRef idx="2">
+            <a:schemeClr val="accent1"/>
+          </a:effectRef>
+          <a:fontRef idx="minor">
+            <a:schemeClr val="lt1"/>
+          </a:fontRef>
+        </p:style>
+        <p:txBody>
+          <a:bodyPr rtlCol="0" anchor="ctr" lIns="0" rIns="0" tIns="0" bIns="0"/>
+          <a:lstStyle/>
+          <a:p>
+            <a:pPr algn="ctr"/>
+          </a:p>
+        </p:txBody>
+      </p:sp>
+      <p:sp>
+        <p:nvSpPr>
+          <p:cNvPr id="32" name="TextBox 31"/>
+          <p:cNvSpPr txBox="1"/>
+          <p:nvPr/>
+        </p:nvSpPr>
+        <p:spPr>
+          <a:xfrm>
+            <a:off x="822960" y="4434840"/>
+            <a:ext cx="1371600" cy="365760"/>
+          </a:xfrm>
+          <a:prstGeom prst="rect">
+            <a:avLst/>
+          </a:prstGeom>
+          <a:noFill/>
+        </p:spPr>
+        <p:txBody>
+          <a:bodyPr wrap="square" lIns="0" rIns="0" tIns="0" bIns="0" anchor="t">
+            <a:spAutoFit/>
+          </a:bodyPr>
+          <a:lstStyle/>
+          <a:p>
+            <a:pPr algn="ctr"/>
+            <a:r>
+              <a:rPr sz="1400" b="1">
+                <a:solidFill>
+                  <a:srgbClr val="F5C86E"/>
+                </a:solidFill>
+                <a:latin typeface="Consolas"/>
+              </a:rPr>
+              <a:t>0.10</a:t>
+            </a:r>
+          </a:p>
+        </p:txBody>
+      </p:sp>
+      <p:sp>
+        <p:nvSpPr>
+          <p:cNvPr id="33" name="TextBox 32"/>
+          <p:cNvSpPr txBox="1"/>
+          <p:nvPr/>
+        </p:nvSpPr>
+        <p:spPr>
+          <a:xfrm>
+            <a:off x="2194560" y="4434840"/>
+            <a:ext cx="2194560" cy="365760"/>
+          </a:xfrm>
+          <a:prstGeom prst="rect">
+            <a:avLst/>
+          </a:prstGeom>
+          <a:noFill/>
+        </p:spPr>
+        <p:txBody>
+          <a:bodyPr wrap="square" lIns="0" rIns="0" tIns="0" bIns="0" anchor="t">
+            <a:spAutoFit/>
+          </a:bodyPr>
+          <a:lstStyle/>
+          <a:p>
+            <a:pPr algn="ctr"/>
+            <a:r>
+              <a:rPr sz="1400" b="1">
+                <a:solidFill>
+                  <a:srgbClr val="E8A87C"/>
+                </a:solidFill>
+                <a:latin typeface="Consolas"/>
+              </a:rPr>
+              <a:t>19.51</a:t>
+            </a:r>
+          </a:p>
+        </p:txBody>
+      </p:sp>
+      <p:sp>
+        <p:nvSpPr>
+          <p:cNvPr id="34" name="TextBox 33"/>
+          <p:cNvSpPr txBox="1"/>
+          <p:nvPr/>
+        </p:nvSpPr>
+        <p:spPr>
+          <a:xfrm>
+            <a:off x="4389120" y="4434840"/>
+            <a:ext cx="2194560" cy="365760"/>
+          </a:xfrm>
+          <a:prstGeom prst="rect">
+            <a:avLst/>
+          </a:prstGeom>
+          <a:noFill/>
+        </p:spPr>
+        <p:txBody>
+          <a:bodyPr wrap="square" lIns="0" rIns="0" tIns="0" bIns="0" anchor="t">
+            <a:spAutoFit/>
+          </a:bodyPr>
+          <a:lstStyle/>
+          <a:p>
+            <a:pPr algn="ctr"/>
+            <a:r>
+              <a:rPr sz="1400" b="1">
+                <a:solidFill>
+                  <a:srgbClr val="E8A87C"/>
+                </a:solidFill>
+                <a:latin typeface="Consolas"/>
+              </a:rPr>
+              <a:t>28.30</a:t>
+            </a:r>
+          </a:p>
+        </p:txBody>
+      </p:sp>
+      <p:sp>
+        <p:nvSpPr>
+          <p:cNvPr id="35" name="Rectangle 34"/>
+          <p:cNvSpPr/>
+          <p:nvPr/>
+        </p:nvSpPr>
+        <p:spPr>
+          <a:xfrm>
+            <a:off x="640080" y="4846320"/>
+            <a:ext cx="5943600" cy="420624"/>
+          </a:xfrm>
+          <a:prstGeom prst="rect">
+            <a:avLst/>
+          </a:prstGeom>
+          <a:solidFill>
+            <a:srgbClr val="555555"/>
+          </a:solidFill>
+          <a:ln>
+            <a:noFill/>
+          </a:ln>
+          <a:effectLst/>
+        </p:spPr>
+        <p:style>
+          <a:lnRef idx="1">
+            <a:schemeClr val="accent1"/>
+          </a:lnRef>
+          <a:fillRef idx="3">
+            <a:schemeClr val="accent1"/>
+          </a:fillRef>
+          <a:effectRef idx="2">
+            <a:schemeClr val="accent1"/>
+          </a:effectRef>
+          <a:fontRef idx="minor">
+            <a:schemeClr val="lt1"/>
+          </a:fontRef>
+        </p:style>
+        <p:txBody>
+          <a:bodyPr rtlCol="0" anchor="ctr" lIns="0" rIns="0" tIns="0" bIns="0"/>
+          <a:lstStyle/>
+          <a:p>
+            <a:pPr algn="ctr"/>
+          </a:p>
+        </p:txBody>
+      </p:sp>
+      <p:sp>
+        <p:nvSpPr>
+          <p:cNvPr id="36" name="TextBox 35"/>
+          <p:cNvSpPr txBox="1"/>
+          <p:nvPr/>
+        </p:nvSpPr>
+        <p:spPr>
+          <a:xfrm>
+            <a:off x="822960" y="4892040"/>
+            <a:ext cx="1371600" cy="365760"/>
+          </a:xfrm>
+          <a:prstGeom prst="rect">
+            <a:avLst/>
+          </a:prstGeom>
+          <a:noFill/>
+        </p:spPr>
+        <p:txBody>
+          <a:bodyPr wrap="square" lIns="0" rIns="0" tIns="0" bIns="0" anchor="t">
+            <a:spAutoFit/>
+          </a:bodyPr>
+          <a:lstStyle/>
+          <a:p>
+            <a:pPr algn="ctr"/>
+            <a:r>
+              <a:rPr sz="1400" b="0">
+                <a:solidFill>
+                  <a:srgbClr val="FFFFFF"/>
+                </a:solidFill>
+                <a:latin typeface="Consolas"/>
+              </a:rPr>
+              <a:t>0.15</a:t>
+            </a:r>
+          </a:p>
+        </p:txBody>
+      </p:sp>
+      <p:sp>
+        <p:nvSpPr>
+          <p:cNvPr id="37" name="TextBox 36"/>
+          <p:cNvSpPr txBox="1"/>
+          <p:nvPr/>
+        </p:nvSpPr>
+        <p:spPr>
+          <a:xfrm>
+            <a:off x="2194560" y="4892040"/>
+            <a:ext cx="2194560" cy="365760"/>
+          </a:xfrm>
+          <a:prstGeom prst="rect">
+            <a:avLst/>
+          </a:prstGeom>
+          <a:noFill/>
+        </p:spPr>
+        <p:txBody>
+          <a:bodyPr wrap="square" lIns="0" rIns="0" tIns="0" bIns="0" anchor="t">
+            <a:spAutoFit/>
+          </a:bodyPr>
+          <a:lstStyle/>
+          <a:p>
+            <a:pPr algn="ctr"/>
+            <a:r>
+              <a:rPr sz="1400" b="0">
+                <a:solidFill>
+                  <a:srgbClr val="FFFFFF"/>
+                </a:solidFill>
+                <a:latin typeface="Consolas"/>
+              </a:rPr>
+              <a:t>20.16</a:t>
+            </a:r>
+          </a:p>
+        </p:txBody>
+      </p:sp>
+      <p:sp>
+        <p:nvSpPr>
+          <p:cNvPr id="38" name="TextBox 37"/>
+          <p:cNvSpPr txBox="1"/>
+          <p:nvPr/>
+        </p:nvSpPr>
+        <p:spPr>
+          <a:xfrm>
+            <a:off x="4389120" y="4892040"/>
+            <a:ext cx="2194560" cy="365760"/>
+          </a:xfrm>
+          <a:prstGeom prst="rect">
+            <a:avLst/>
+          </a:prstGeom>
+          <a:noFill/>
+        </p:spPr>
+        <p:txBody>
+          <a:bodyPr wrap="square" lIns="0" rIns="0" tIns="0" bIns="0" anchor="t">
+            <a:spAutoFit/>
+          </a:bodyPr>
+          <a:lstStyle/>
+          <a:p>
+            <a:pPr algn="ctr"/>
+            <a:r>
+              <a:rPr sz="1400" b="0">
+                <a:solidFill>
+                  <a:srgbClr val="FFFFFF"/>
+                </a:solidFill>
+                <a:latin typeface="Consolas"/>
+              </a:rPr>
+              <a:t>29.39</a:t>
+            </a:r>
+          </a:p>
+        </p:txBody>
+      </p:sp>
+      <p:sp>
+        <p:nvSpPr>
+          <p:cNvPr id="39" name="Rectangle 38"/>
+          <p:cNvSpPr/>
+          <p:nvPr/>
+        </p:nvSpPr>
+        <p:spPr>
+          <a:xfrm>
+            <a:off x="640080" y="5303520"/>
+            <a:ext cx="5943600" cy="420624"/>
+          </a:xfrm>
+          <a:prstGeom prst="rect">
+            <a:avLst/>
+          </a:prstGeom>
+          <a:solidFill>
+            <a:srgbClr val="555555"/>
+          </a:solidFill>
+          <a:ln>
+            <a:noFill/>
+          </a:ln>
+          <a:effectLst/>
+        </p:spPr>
+        <p:style>
+          <a:lnRef idx="1">
+            <a:schemeClr val="accent1"/>
+          </a:lnRef>
+          <a:fillRef idx="3">
+            <a:schemeClr val="accent1"/>
+          </a:fillRef>
+          <a:effectRef idx="2">
+            <a:schemeClr val="accent1"/>
+          </a:effectRef>
+          <a:fontRef idx="minor">
+            <a:schemeClr val="lt1"/>
+          </a:fontRef>
+        </p:style>
+        <p:txBody>
+          <a:bodyPr rtlCol="0" anchor="ctr" lIns="0" rIns="0" tIns="0" bIns="0"/>
+          <a:lstStyle/>
+          <a:p>
+            <a:pPr algn="ctr"/>
+          </a:p>
+        </p:txBody>
+      </p:sp>
+      <p:sp>
+        <p:nvSpPr>
+          <p:cNvPr id="40" name="TextBox 39"/>
+          <p:cNvSpPr txBox="1"/>
+          <p:nvPr/>
+        </p:nvSpPr>
+        <p:spPr>
+          <a:xfrm>
+            <a:off x="822960" y="5349240"/>
+            <a:ext cx="1371600" cy="365760"/>
+          </a:xfrm>
+          <a:prstGeom prst="rect">
+            <a:avLst/>
+          </a:prstGeom>
+          <a:noFill/>
+        </p:spPr>
+        <p:txBody>
+          <a:bodyPr wrap="square" lIns="0" rIns="0" tIns="0" bIns="0" anchor="t">
+            <a:spAutoFit/>
+          </a:bodyPr>
+          <a:lstStyle/>
+          <a:p>
+            <a:pPr algn="ctr"/>
+            <a:r>
+              <a:rPr sz="1400" b="0">
+                <a:solidFill>
+                  <a:srgbClr val="FFFFFF"/>
+                </a:solidFill>
+                <a:latin typeface="Consolas"/>
+              </a:rPr>
+              <a:t>0.20</a:t>
+            </a:r>
+          </a:p>
+        </p:txBody>
+      </p:sp>
+      <p:sp>
+        <p:nvSpPr>
+          <p:cNvPr id="41" name="TextBox 40"/>
+          <p:cNvSpPr txBox="1"/>
+          <p:nvPr/>
+        </p:nvSpPr>
+        <p:spPr>
+          <a:xfrm>
+            <a:off x="2194560" y="5349240"/>
+            <a:ext cx="2194560" cy="365760"/>
+          </a:xfrm>
+          <a:prstGeom prst="rect">
+            <a:avLst/>
+          </a:prstGeom>
+          <a:noFill/>
+        </p:spPr>
+        <p:txBody>
+          <a:bodyPr wrap="square" lIns="0" rIns="0" tIns="0" bIns="0" anchor="t">
+            <a:spAutoFit/>
+          </a:bodyPr>
+          <a:lstStyle/>
+          <a:p>
+            <a:pPr algn="ctr"/>
+            <a:r>
+              <a:rPr sz="1400" b="0">
+                <a:solidFill>
+                  <a:srgbClr val="FFFFFF"/>
+                </a:solidFill>
+                <a:latin typeface="Consolas"/>
+              </a:rPr>
+              <a:t>20.69</a:t>
+            </a:r>
+          </a:p>
+        </p:txBody>
+      </p:sp>
+      <p:sp>
+        <p:nvSpPr>
+          <p:cNvPr id="42" name="TextBox 41"/>
+          <p:cNvSpPr txBox="1"/>
+          <p:nvPr/>
+        </p:nvSpPr>
+        <p:spPr>
+          <a:xfrm>
+            <a:off x="4389120" y="5349240"/>
+            <a:ext cx="2194560" cy="365760"/>
+          </a:xfrm>
+          <a:prstGeom prst="rect">
+            <a:avLst/>
+          </a:prstGeom>
+          <a:noFill/>
+        </p:spPr>
+        <p:txBody>
+          <a:bodyPr wrap="square" lIns="0" rIns="0" tIns="0" bIns="0" anchor="t">
+            <a:spAutoFit/>
+          </a:bodyPr>
+          <a:lstStyle/>
+          <a:p>
+            <a:pPr algn="ctr"/>
+            <a:r>
+              <a:rPr sz="1400" b="0">
+                <a:solidFill>
+                  <a:srgbClr val="FFFFFF"/>
+                </a:solidFill>
+                <a:latin typeface="Consolas"/>
+              </a:rPr>
+              <a:t>29.43</a:t>
+            </a:r>
+          </a:p>
+        </p:txBody>
+      </p:sp>
+      <p:sp>
+        <p:nvSpPr>
+          <p:cNvPr id="43" name="Rounded Rectangle 42"/>
+          <p:cNvSpPr/>
+          <p:nvPr/>
+        </p:nvSpPr>
+        <p:spPr>
+          <a:xfrm>
+            <a:off x="6949440" y="1554480"/>
+            <a:ext cx="4754880" cy="4114800"/>
+          </a:xfrm>
+          <a:prstGeom prst="roundRect">
+            <a:avLst>
+              <a:gd name="adj" fmla="val 8000"/>
+            </a:avLst>
+          </a:prstGeom>
+          <a:solidFill>
+            <a:srgbClr val="555555"/>
+          </a:solidFill>
+          <a:ln>
+            <a:noFill/>
+          </a:ln>
+          <a:effectLst/>
+        </p:spPr>
+        <p:style>
+          <a:lnRef idx="1">
+            <a:schemeClr val="accent1"/>
+          </a:lnRef>
+          <a:fillRef idx="3">
+            <a:schemeClr val="accent1"/>
+          </a:fillRef>
+          <a:effectRef idx="2">
+            <a:schemeClr val="accent1"/>
+          </a:effectRef>
+          <a:fontRef idx="minor">
+            <a:schemeClr val="lt1"/>
+          </a:fontRef>
+        </p:style>
+        <p:txBody>
+          <a:bodyPr rtlCol="0" anchor="ctr" lIns="0" rIns="0" tIns="0" bIns="0"/>
+          <a:lstStyle/>
+          <a:p>
+            <a:pPr algn="ctr"/>
+          </a:p>
+        </p:txBody>
+      </p:sp>
+      <p:sp>
+        <p:nvSpPr>
+          <p:cNvPr id="44" name="TextBox 43"/>
+          <p:cNvSpPr txBox="1"/>
+          <p:nvPr/>
+        </p:nvSpPr>
+        <p:spPr>
+          <a:xfrm>
+            <a:off x="7132320" y="1691640"/>
+            <a:ext cx="4572000" cy="365760"/>
           </a:xfrm>
           <a:prstGeom prst="rect">
             <a:avLst/>
@@ -13103,27 +15537,27 @@
           <a:p>
             <a:pPr algn="l"/>
             <a:r>
-              <a:rPr sz="1600" b="1">
+              <a:rPr sz="1800" b="1">
                 <a:solidFill>
                   <a:srgbClr val="5BB5BE"/>
                 </a:solidFill>
                 <a:latin typeface="Cambria"/>
               </a:rPr>
-              <a:t>Qualitative example (test-clean utterance 1)</a:t>
-            </a:r>
-          </a:p>
-        </p:txBody>
-      </p:sp>
-      <p:sp>
-        <p:nvSpPr>
-          <p:cNvPr id="15" name="TextBox 14"/>
-          <p:cNvSpPr txBox="1"/>
-          <p:nvPr/>
-        </p:nvSpPr>
-        <p:spPr>
-          <a:xfrm>
-            <a:off x="822960" y="3703320"/>
-            <a:ext cx="1371600" cy="365760"/>
+              <a:t>Observations</a:t>
+            </a:r>
+          </a:p>
+        </p:txBody>
+      </p:sp>
+      <p:sp>
+        <p:nvSpPr>
+          <p:cNvPr id="45" name="TextBox 44"/>
+          <p:cNvSpPr txBox="1"/>
+          <p:nvPr/>
+        </p:nvSpPr>
+        <p:spPr>
+          <a:xfrm>
+            <a:off x="7178040" y="2194560"/>
+            <a:ext cx="274320" cy="365760"/>
           </a:xfrm>
           <a:prstGeom prst="rect">
             <a:avLst/>
@@ -13138,27 +15572,378 @@
           <a:p>
             <a:pPr algn="l"/>
             <a:r>
-              <a:rPr sz="1300" b="1">
+              <a:rPr sz="1400" b="0">
+                <a:solidFill>
+                  <a:srgbClr val="E96379"/>
+                </a:solidFill>
+                <a:latin typeface="Calibri"/>
+              </a:rPr>
+              <a:t>●</a:t>
+            </a:r>
+          </a:p>
+        </p:txBody>
+      </p:sp>
+      <p:sp>
+        <p:nvSpPr>
+          <p:cNvPr id="46" name="TextBox 45"/>
+          <p:cNvSpPr txBox="1"/>
+          <p:nvPr/>
+        </p:nvSpPr>
+        <p:spPr>
+          <a:xfrm>
+            <a:off x="7406640" y="2194560"/>
+            <a:ext cx="4297680" cy="365760"/>
+          </a:xfrm>
+          <a:prstGeom prst="rect">
+            <a:avLst/>
+          </a:prstGeom>
+          <a:noFill/>
+        </p:spPr>
+        <p:txBody>
+          <a:bodyPr wrap="square" lIns="0" rIns="0" tIns="0" bIns="0" anchor="t">
+            <a:spAutoFit/>
+          </a:bodyPr>
+          <a:lstStyle/>
+          <a:p>
+            <a:pPr algn="l"/>
+            <a:r>
+              <a:rPr sz="1300" b="1" i="0">
+                <a:solidFill>
+                  <a:srgbClr val="E96379"/>
+                </a:solidFill>
+                <a:latin typeface="Calibri"/>
+              </a:rPr>
+              <a:t>α ≤ 0.07 </a:t>
+            </a:r>
+            <a:r>
+              <a:rPr sz="1300" b="0" i="0">
+                <a:solidFill>
+                  <a:srgbClr val="FFFFFF"/>
+                </a:solidFill>
+                <a:latin typeface="Calibri"/>
+              </a:rPr>
+              <a:t>only marginal gains</a:t>
+            </a:r>
+          </a:p>
+        </p:txBody>
+      </p:sp>
+      <p:sp>
+        <p:nvSpPr>
+          <p:cNvPr id="47" name="TextBox 46"/>
+          <p:cNvSpPr txBox="1"/>
+          <p:nvPr/>
+        </p:nvSpPr>
+        <p:spPr>
+          <a:xfrm>
+            <a:off x="7178040" y="2697480"/>
+            <a:ext cx="274320" cy="365760"/>
+          </a:xfrm>
+          <a:prstGeom prst="rect">
+            <a:avLst/>
+          </a:prstGeom>
+          <a:noFill/>
+        </p:spPr>
+        <p:txBody>
+          <a:bodyPr wrap="square" lIns="0" rIns="0" tIns="0" bIns="0" anchor="t">
+            <a:spAutoFit/>
+          </a:bodyPr>
+          <a:lstStyle/>
+          <a:p>
+            <a:pPr algn="l"/>
+            <a:r>
+              <a:rPr sz="1400" b="0">
+                <a:solidFill>
+                  <a:srgbClr val="E96379"/>
+                </a:solidFill>
+                <a:latin typeface="Calibri"/>
+              </a:rPr>
+              <a:t>●</a:t>
+            </a:r>
+          </a:p>
+        </p:txBody>
+      </p:sp>
+      <p:sp>
+        <p:nvSpPr>
+          <p:cNvPr id="48" name="TextBox 47"/>
+          <p:cNvSpPr txBox="1"/>
+          <p:nvPr/>
+        </p:nvSpPr>
+        <p:spPr>
+          <a:xfrm>
+            <a:off x="7406640" y="2697480"/>
+            <a:ext cx="4297680" cy="365760"/>
+          </a:xfrm>
+          <a:prstGeom prst="rect">
+            <a:avLst/>
+          </a:prstGeom>
+          <a:noFill/>
+        </p:spPr>
+        <p:txBody>
+          <a:bodyPr wrap="square" lIns="0" rIns="0" tIns="0" bIns="0" anchor="t">
+            <a:spAutoFit/>
+          </a:bodyPr>
+          <a:lstStyle/>
+          <a:p>
+            <a:pPr algn="l"/>
+            <a:r>
+              <a:rPr sz="1300" b="1" i="0">
+                <a:solidFill>
+                  <a:srgbClr val="E96379"/>
+                </a:solidFill>
+                <a:latin typeface="Calibri"/>
+              </a:rPr>
+              <a:t>α = 0.10 </a:t>
+            </a:r>
+            <a:r>
+              <a:rPr sz="1300" b="0" i="0">
+                <a:solidFill>
+                  <a:srgbClr val="FFFFFF"/>
+                </a:solidFill>
+                <a:latin typeface="Calibri"/>
+              </a:rPr>
+              <a:t>sharp minimum — best by far</a:t>
+            </a:r>
+          </a:p>
+        </p:txBody>
+      </p:sp>
+      <p:sp>
+        <p:nvSpPr>
+          <p:cNvPr id="49" name="TextBox 48"/>
+          <p:cNvSpPr txBox="1"/>
+          <p:nvPr/>
+        </p:nvSpPr>
+        <p:spPr>
+          <a:xfrm>
+            <a:off x="7178040" y="3200400"/>
+            <a:ext cx="274320" cy="365760"/>
+          </a:xfrm>
+          <a:prstGeom prst="rect">
+            <a:avLst/>
+          </a:prstGeom>
+          <a:noFill/>
+        </p:spPr>
+        <p:txBody>
+          <a:bodyPr wrap="square" lIns="0" rIns="0" tIns="0" bIns="0" anchor="t">
+            <a:spAutoFit/>
+          </a:bodyPr>
+          <a:lstStyle/>
+          <a:p>
+            <a:pPr algn="l"/>
+            <a:r>
+              <a:rPr sz="1400" b="0">
+                <a:solidFill>
+                  <a:srgbClr val="E96379"/>
+                </a:solidFill>
+                <a:latin typeface="Calibri"/>
+              </a:rPr>
+              <a:t>●</a:t>
+            </a:r>
+          </a:p>
+        </p:txBody>
+      </p:sp>
+      <p:sp>
+        <p:nvSpPr>
+          <p:cNvPr id="50" name="TextBox 49"/>
+          <p:cNvSpPr txBox="1"/>
+          <p:nvPr/>
+        </p:nvSpPr>
+        <p:spPr>
+          <a:xfrm>
+            <a:off x="7406640" y="3200400"/>
+            <a:ext cx="4297680" cy="365760"/>
+          </a:xfrm>
+          <a:prstGeom prst="rect">
+            <a:avLst/>
+          </a:prstGeom>
+          <a:noFill/>
+        </p:spPr>
+        <p:txBody>
+          <a:bodyPr wrap="square" lIns="0" rIns="0" tIns="0" bIns="0" anchor="t">
+            <a:spAutoFit/>
+          </a:bodyPr>
+          <a:lstStyle/>
+          <a:p>
+            <a:pPr algn="l"/>
+            <a:r>
+              <a:rPr sz="1300" b="1" i="0">
+                <a:solidFill>
+                  <a:srgbClr val="E96379"/>
+                </a:solidFill>
+                <a:latin typeface="Calibri"/>
+              </a:rPr>
+              <a:t>α ≥ 0.15 </a:t>
+            </a:r>
+            <a:r>
+              <a:rPr sz="1300" b="0" i="0">
+                <a:solidFill>
+                  <a:srgbClr val="FFFFFF"/>
+                </a:solidFill>
+                <a:latin typeface="Calibri"/>
+              </a:rPr>
+              <a:t>regresses again</a:t>
+            </a:r>
+          </a:p>
+        </p:txBody>
+      </p:sp>
+      <p:sp>
+        <p:nvSpPr>
+          <p:cNvPr id="51" name="TextBox 50"/>
+          <p:cNvSpPr txBox="1"/>
+          <p:nvPr/>
+        </p:nvSpPr>
+        <p:spPr>
+          <a:xfrm>
+            <a:off x="7178040" y="3703320"/>
+            <a:ext cx="274320" cy="365760"/>
+          </a:xfrm>
+          <a:prstGeom prst="rect">
+            <a:avLst/>
+          </a:prstGeom>
+          <a:noFill/>
+        </p:spPr>
+        <p:txBody>
+          <a:bodyPr wrap="square" lIns="0" rIns="0" tIns="0" bIns="0" anchor="t">
+            <a:spAutoFit/>
+          </a:bodyPr>
+          <a:lstStyle/>
+          <a:p>
+            <a:pPr algn="l"/>
+            <a:r>
+              <a:rPr sz="1400" b="0">
+                <a:solidFill>
+                  <a:srgbClr val="E96379"/>
+                </a:solidFill>
+                <a:latin typeface="Calibri"/>
+              </a:rPr>
+              <a:t>●</a:t>
+            </a:r>
+          </a:p>
+        </p:txBody>
+      </p:sp>
+      <p:sp>
+        <p:nvSpPr>
+          <p:cNvPr id="52" name="TextBox 51"/>
+          <p:cNvSpPr txBox="1"/>
+          <p:nvPr/>
+        </p:nvSpPr>
+        <p:spPr>
+          <a:xfrm>
+            <a:off x="7406640" y="3703320"/>
+            <a:ext cx="4297680" cy="365760"/>
+          </a:xfrm>
+          <a:prstGeom prst="rect">
+            <a:avLst/>
+          </a:prstGeom>
+          <a:noFill/>
+        </p:spPr>
+        <p:txBody>
+          <a:bodyPr wrap="square" lIns="0" rIns="0" tIns="0" bIns="0" anchor="t">
+            <a:spAutoFit/>
+          </a:bodyPr>
+          <a:lstStyle/>
+          <a:p>
+            <a:pPr algn="l"/>
+            <a:r>
+              <a:rPr sz="1300" b="1" i="0">
+                <a:solidFill>
+                  <a:srgbClr val="E96379"/>
+                </a:solidFill>
+                <a:latin typeface="Calibri"/>
+              </a:rPr>
+              <a:t>Sharp U-curve </a:t>
+            </a:r>
+            <a:r>
+              <a:rPr sz="1300" b="0" i="0">
+                <a:solidFill>
+                  <a:srgbClr val="FFFFFF"/>
+                </a:solidFill>
+                <a:latin typeface="Calibri"/>
+              </a:rPr>
+              <a:t>→ sensitive to α</a:t>
+            </a:r>
+          </a:p>
+        </p:txBody>
+      </p:sp>
+      <p:sp>
+        <p:nvSpPr>
+          <p:cNvPr id="53" name="TextBox 52"/>
+          <p:cNvSpPr txBox="1"/>
+          <p:nvPr/>
+        </p:nvSpPr>
+        <p:spPr>
+          <a:xfrm>
+            <a:off x="7132320" y="4434840"/>
+            <a:ext cx="4572000" cy="365760"/>
+          </a:xfrm>
+          <a:prstGeom prst="rect">
+            <a:avLst/>
+          </a:prstGeom>
+          <a:noFill/>
+        </p:spPr>
+        <p:txBody>
+          <a:bodyPr wrap="square" lIns="0" rIns="0" tIns="0" bIns="0" anchor="t">
+            <a:spAutoFit/>
+          </a:bodyPr>
+          <a:lstStyle/>
+          <a:p>
+            <a:pPr algn="l"/>
+            <a:r>
+              <a:rPr sz="1400" b="1">
                 <a:solidFill>
                   <a:srgbClr val="F5C86E"/>
                 </a:solidFill>
+                <a:latin typeface="Cambria"/>
+              </a:rPr>
+              <a:t>Best operating point:</a:t>
+            </a:r>
+          </a:p>
+        </p:txBody>
+      </p:sp>
+      <p:sp>
+        <p:nvSpPr>
+          <p:cNvPr id="54" name="TextBox 53"/>
+          <p:cNvSpPr txBox="1"/>
+          <p:nvPr/>
+        </p:nvSpPr>
+        <p:spPr>
+          <a:xfrm>
+            <a:off x="7132320" y="4800600"/>
+            <a:ext cx="4572000" cy="365760"/>
+          </a:xfrm>
+          <a:prstGeom prst="rect">
+            <a:avLst/>
+          </a:prstGeom>
+          <a:noFill/>
+        </p:spPr>
+        <p:txBody>
+          <a:bodyPr wrap="square" lIns="0" rIns="0" tIns="0" bIns="0" anchor="t">
+            <a:spAutoFit/>
+          </a:bodyPr>
+          <a:lstStyle/>
+          <a:p>
+            <a:pPr algn="l"/>
+            <a:r>
+              <a:rPr sz="1500" b="1">
+                <a:solidFill>
+                  <a:srgbClr val="FFFFFF"/>
+                </a:solidFill>
                 <a:latin typeface="Consolas"/>
               </a:rPr>
-              <a:t>REF:</a:t>
-            </a:r>
-          </a:p>
-        </p:txBody>
-      </p:sp>
-      <p:sp>
-        <p:nvSpPr>
-          <p:cNvPr id="16" name="TextBox 15"/>
-          <p:cNvSpPr txBox="1"/>
-          <p:nvPr/>
-        </p:nvSpPr>
-        <p:spPr>
-          <a:xfrm>
-            <a:off x="1828800" y="3703320"/>
-            <a:ext cx="9601200" cy="365760"/>
+              <a:t>α = 0.10 → 19.51 / 28.30</a:t>
+            </a:r>
+          </a:p>
+        </p:txBody>
+      </p:sp>
+      <p:sp>
+        <p:nvSpPr>
+          <p:cNvPr id="55" name="TextBox 54"/>
+          <p:cNvSpPr txBox="1"/>
+          <p:nvPr/>
+        </p:nvSpPr>
+        <p:spPr>
+          <a:xfrm>
+            <a:off x="7132320" y="5166360"/>
+            <a:ext cx="4572000" cy="365760"/>
           </a:xfrm>
           <a:prstGeom prst="rect">
             <a:avLst/>
@@ -13173,375 +15958,20 @@
           <a:p>
             <a:pPr algn="l"/>
             <a:r>
-              <a:rPr sz="1200" b="0" i="0">
-                <a:solidFill>
-                  <a:srgbClr val="FFFFFF"/>
-                </a:solidFill>
-                <a:latin typeface="Consolas"/>
-              </a:rPr>
-              <a:t>... THEORY OF </a:t>
-            </a:r>
-            <a:r>
-              <a:rPr sz="1200" b="1" i="0">
-                <a:solidFill>
-                  <a:srgbClr val="E8A87C"/>
-                </a:solidFill>
-                <a:latin typeface="Consolas"/>
-              </a:rPr>
-              <a:t>MEMORY</a:t>
-            </a:r>
-            <a:r>
-              <a:rPr sz="1200" b="0" i="0">
-                <a:solidFill>
-                  <a:srgbClr val="FFFFFF"/>
-                </a:solidFill>
-                <a:latin typeface="Consolas"/>
-              </a:rPr>
-              <a:t> MUST </a:t>
-            </a:r>
-            <a:r>
-              <a:rPr sz="1200" b="1" i="0">
-                <a:solidFill>
-                  <a:srgbClr val="E8A87C"/>
-                </a:solidFill>
-                <a:latin typeface="Consolas"/>
-              </a:rPr>
-              <a:t>ARRIVE</a:t>
-            </a:r>
-            <a:r>
-              <a:rPr sz="1200" b="0" i="0">
-                <a:solidFill>
-                  <a:srgbClr val="FFFFFF"/>
-                </a:solidFill>
-                <a:latin typeface="Consolas"/>
-              </a:rPr>
-              <a:t> AT ... </a:t>
-            </a:r>
-            <a:r>
-              <a:rPr sz="1200" b="1" i="0">
-                <a:solidFill>
-                  <a:srgbClr val="E8A87C"/>
-                </a:solidFill>
-                <a:latin typeface="Consolas"/>
-              </a:rPr>
-              <a:t>VIRTUE</a:t>
-            </a:r>
-            <a:r>
-              <a:rPr sz="1200" b="0" i="0">
-                <a:solidFill>
-                  <a:srgbClr val="FFFFFF"/>
-                </a:solidFill>
-                <a:latin typeface="Consolas"/>
-              </a:rPr>
-              <a:t> ... </a:t>
-            </a:r>
-            <a:r>
-              <a:rPr sz="1200" b="1" i="0">
-                <a:solidFill>
-                  <a:srgbClr val="E8A87C"/>
-                </a:solidFill>
-                <a:latin typeface="Consolas"/>
-              </a:rPr>
-              <a:t>SINGLED OUT</a:t>
-            </a:r>
-            <a:r>
-              <a:rPr sz="1200" b="0" i="0">
-                <a:solidFill>
-                  <a:srgbClr val="FFFFFF"/>
-                </a:solidFill>
-                <a:latin typeface="Consolas"/>
-              </a:rPr>
-              <a:t> ...</a:t>
-            </a:r>
-          </a:p>
-        </p:txBody>
-      </p:sp>
-      <p:sp>
-        <p:nvSpPr>
-          <p:cNvPr id="17" name="TextBox 16"/>
-          <p:cNvSpPr txBox="1"/>
-          <p:nvPr/>
-        </p:nvSpPr>
-        <p:spPr>
-          <a:xfrm>
-            <a:off x="822960" y="4206240"/>
-            <a:ext cx="1371600" cy="365760"/>
-          </a:xfrm>
-          <a:prstGeom prst="rect">
-            <a:avLst/>
-          </a:prstGeom>
-          <a:noFill/>
-        </p:spPr>
-        <p:txBody>
-          <a:bodyPr wrap="square" lIns="0" rIns="0" tIns="0" bIns="0" anchor="t">
-            <a:spAutoFit/>
-          </a:bodyPr>
-          <a:lstStyle/>
-          <a:p>
-            <a:pPr algn="l"/>
-            <a:r>
-              <a:rPr sz="1300" b="1">
-                <a:solidFill>
-                  <a:srgbClr val="E96379"/>
-                </a:solidFill>
-                <a:latin typeface="Consolas"/>
-              </a:rPr>
-              <a:t>Baseline:</a:t>
-            </a:r>
-          </a:p>
-        </p:txBody>
-      </p:sp>
-      <p:sp>
-        <p:nvSpPr>
-          <p:cNvPr id="18" name="TextBox 17"/>
-          <p:cNvSpPr txBox="1"/>
-          <p:nvPr/>
-        </p:nvSpPr>
-        <p:spPr>
-          <a:xfrm>
-            <a:off x="1828800" y="4206240"/>
-            <a:ext cx="9601200" cy="365760"/>
-          </a:xfrm>
-          <a:prstGeom prst="rect">
-            <a:avLst/>
-          </a:prstGeom>
-          <a:noFill/>
-        </p:spPr>
-        <p:txBody>
-          <a:bodyPr wrap="square" lIns="0" rIns="0" tIns="0" bIns="0" anchor="t">
-            <a:spAutoFit/>
-          </a:bodyPr>
-          <a:lstStyle/>
-          <a:p>
-            <a:pPr algn="l"/>
-            <a:r>
-              <a:rPr sz="1200" b="0" i="0">
-                <a:solidFill>
-                  <a:srgbClr val="FFFFFF"/>
-                </a:solidFill>
-                <a:latin typeface="Consolas"/>
-              </a:rPr>
-              <a:t>... THEORY OF MEMERY MUST </a:t>
-            </a:r>
-            <a:r>
-              <a:rPr sz="1200" b="1" i="0">
-                <a:solidFill>
-                  <a:srgbClr val="E96379"/>
-                </a:solidFill>
-                <a:latin typeface="Consolas"/>
-              </a:rPr>
-              <a:t>ARIVE</a:t>
-            </a:r>
-            <a:r>
-              <a:rPr sz="1200" b="0" i="0">
-                <a:solidFill>
-                  <a:srgbClr val="FFFFFF"/>
-                </a:solidFill>
-                <a:latin typeface="Consolas"/>
-              </a:rPr>
-              <a:t> AT ... </a:t>
-            </a:r>
-            <a:r>
-              <a:rPr sz="1200" b="1" i="0">
-                <a:solidFill>
-                  <a:srgbClr val="E96379"/>
-                </a:solidFill>
-                <a:latin typeface="Consolas"/>
-              </a:rPr>
-              <a:t>VERTUE</a:t>
-            </a:r>
-            <a:r>
-              <a:rPr sz="1200" b="0" i="0">
-                <a:solidFill>
-                  <a:srgbClr val="FFFFFF"/>
-                </a:solidFill>
-                <a:latin typeface="Consolas"/>
-              </a:rPr>
-              <a:t> ... </a:t>
-            </a:r>
-            <a:r>
-              <a:rPr sz="1200" b="1" i="0">
-                <a:solidFill>
-                  <a:srgbClr val="E96379"/>
-                </a:solidFill>
-                <a:latin typeface="Consolas"/>
-              </a:rPr>
-              <a:t>SINGLEDOUT</a:t>
-            </a:r>
-            <a:r>
-              <a:rPr sz="1200" b="0" i="0">
-                <a:solidFill>
-                  <a:srgbClr val="FFFFFF"/>
-                </a:solidFill>
-                <a:latin typeface="Consolas"/>
-              </a:rPr>
-              <a:t> ...</a:t>
-            </a:r>
-          </a:p>
-        </p:txBody>
-      </p:sp>
-      <p:sp>
-        <p:nvSpPr>
-          <p:cNvPr id="19" name="TextBox 18"/>
-          <p:cNvSpPr txBox="1"/>
-          <p:nvPr/>
-        </p:nvSpPr>
-        <p:spPr>
-          <a:xfrm>
-            <a:off x="822960" y="4709160"/>
-            <a:ext cx="1371600" cy="365760"/>
-          </a:xfrm>
-          <a:prstGeom prst="rect">
-            <a:avLst/>
-          </a:prstGeom>
-          <a:noFill/>
-        </p:spPr>
-        <p:txBody>
-          <a:bodyPr wrap="square" lIns="0" rIns="0" tIns="0" bIns="0" anchor="t">
-            <a:spAutoFit/>
-          </a:bodyPr>
-          <a:lstStyle/>
-          <a:p>
-            <a:pPr algn="l"/>
-            <a:r>
-              <a:rPr sz="1300" b="1">
-                <a:solidFill>
-                  <a:srgbClr val="5BB5BE"/>
-                </a:solidFill>
-                <a:latin typeface="Consolas"/>
-              </a:rPr>
-              <a:t>LS α=0.10:</a:t>
-            </a:r>
-          </a:p>
-        </p:txBody>
-      </p:sp>
-      <p:sp>
-        <p:nvSpPr>
-          <p:cNvPr id="20" name="TextBox 19"/>
-          <p:cNvSpPr txBox="1"/>
-          <p:nvPr/>
-        </p:nvSpPr>
-        <p:spPr>
-          <a:xfrm>
-            <a:off x="1828800" y="4709160"/>
-            <a:ext cx="9601200" cy="365760"/>
-          </a:xfrm>
-          <a:prstGeom prst="rect">
-            <a:avLst/>
-          </a:prstGeom>
-          <a:noFill/>
-        </p:spPr>
-        <p:txBody>
-          <a:bodyPr wrap="square" lIns="0" rIns="0" tIns="0" bIns="0" anchor="t">
-            <a:spAutoFit/>
-          </a:bodyPr>
-          <a:lstStyle/>
-          <a:p>
-            <a:pPr algn="l"/>
-            <a:r>
-              <a:rPr sz="1200" b="0" i="0">
-                <a:solidFill>
-                  <a:srgbClr val="FFFFFF"/>
-                </a:solidFill>
-                <a:latin typeface="Consolas"/>
-              </a:rPr>
-              <a:t>... THEORY OF MEMERY MUST </a:t>
-            </a:r>
-            <a:r>
-              <a:rPr sz="1200" b="1" i="0">
-                <a:solidFill>
-                  <a:srgbClr val="5BB5BE"/>
-                </a:solidFill>
-                <a:latin typeface="Consolas"/>
-              </a:rPr>
-              <a:t>ARRIVE</a:t>
-            </a:r>
-            <a:r>
-              <a:rPr sz="1200" b="0" i="0">
-                <a:solidFill>
-                  <a:srgbClr val="FFFFFF"/>
-                </a:solidFill>
-                <a:latin typeface="Consolas"/>
-              </a:rPr>
-              <a:t> AT ... </a:t>
-            </a:r>
-            <a:r>
-              <a:rPr sz="1200" b="1" i="0">
-                <a:solidFill>
-                  <a:srgbClr val="5BB5BE"/>
-                </a:solidFill>
-                <a:latin typeface="Consolas"/>
-              </a:rPr>
-              <a:t>VIRTUE</a:t>
-            </a:r>
-            <a:r>
-              <a:rPr sz="1200" b="0" i="0">
-                <a:solidFill>
-                  <a:srgbClr val="FFFFFF"/>
-                </a:solidFill>
-                <a:latin typeface="Consolas"/>
-              </a:rPr>
-              <a:t> ... </a:t>
-            </a:r>
-            <a:r>
-              <a:rPr sz="1200" b="1" i="0">
-                <a:solidFill>
-                  <a:srgbClr val="5BB5BE"/>
-                </a:solidFill>
-                <a:latin typeface="Consolas"/>
-              </a:rPr>
-              <a:t>SINGLED OUT</a:t>
-            </a:r>
-            <a:r>
-              <a:rPr sz="1200" b="0" i="0">
-                <a:solidFill>
-                  <a:srgbClr val="FFFFFF"/>
-                </a:solidFill>
-                <a:latin typeface="Consolas"/>
-              </a:rPr>
-              <a:t> ...</a:t>
-            </a:r>
-          </a:p>
-        </p:txBody>
-      </p:sp>
-      <p:sp>
-        <p:nvSpPr>
-          <p:cNvPr id="21" name="TextBox 20"/>
-          <p:cNvSpPr txBox="1"/>
-          <p:nvPr/>
-        </p:nvSpPr>
-        <p:spPr>
-          <a:xfrm>
-            <a:off x="640080" y="5349240"/>
-            <a:ext cx="10972800" cy="365760"/>
-          </a:xfrm>
-          <a:prstGeom prst="rect">
-            <a:avLst/>
-          </a:prstGeom>
-          <a:noFill/>
-        </p:spPr>
-        <p:txBody>
-          <a:bodyPr wrap="square" lIns="0" rIns="0" tIns="0" bIns="0" anchor="t">
-            <a:spAutoFit/>
-          </a:bodyPr>
-          <a:lstStyle/>
-          <a:p>
-            <a:pPr algn="l"/>
-            <a:r>
-              <a:rPr sz="1300" b="0">
-                <a:solidFill>
-                  <a:srgbClr val="F5C86E"/>
+              <a:rPr sz="1200" b="0">
+                <a:solidFill>
+                  <a:srgbClr val="CCCCCC"/>
                 </a:solidFill>
                 <a:latin typeface="Cambria"/>
               </a:rPr>
-              <a:t>→ Spelling errors (ARIVE, VERTUE) and spacing (SINGLEDOUT) corrected by Label Smoothing.</a:t>
-            </a:r>
-          </a:p>
-        </p:txBody>
-      </p:sp>
-      <p:sp>
-        <p:nvSpPr>
-          <p:cNvPr id="22" name="TextBox 21"/>
+              <a:t>Overall best of all configs.</a:t>
+            </a:r>
+          </a:p>
+        </p:txBody>
+      </p:sp>
+      <p:sp>
+        <p:nvSpPr>
+          <p:cNvPr id="56" name="TextBox 55"/>
           <p:cNvSpPr txBox="1"/>
           <p:nvPr/>
         </p:nvSpPr>
@@ -13576,7 +16006,7 @@
       </p:sp>
       <p:sp>
         <p:nvSpPr>
-          <p:cNvPr id="23" name="TextBox 22"/>
+          <p:cNvPr id="57" name="TextBox 56"/>
           <p:cNvSpPr txBox="1"/>
           <p:nvPr/>
         </p:nvSpPr>
